--- a/public/lessons/year-6-maths/spring/week-16/solve-equivalence-problems/teaching-powerpoint-v1.pptx
+++ b/public/lessons/year-6-maths/spring/week-16/solve-equivalence-problems/teaching-powerpoint-v1.pptx
@@ -2,24 +2,24 @@
 <file path=ppt/presentation.xml><?xml version="1.0" encoding="utf-8"?>
 <p:presentation xmlns:p="http://schemas.openxmlformats.org/presentationml/2006/main">
   <p:sldMasterIdLst>
-    <p:sldMasterId xmlns:r="http://schemas.openxmlformats.org/officeDocument/2006/relationships" id="2147483648" r:id="R2e2625ce350a40f9"/>
+    <p:sldMasterId xmlns:r="http://schemas.openxmlformats.org/officeDocument/2006/relationships" id="2147483648" r:id="R4718be7c54a04190"/>
   </p:sldMasterIdLst>
   <p:notesMasterIdLst>
-    <p:notesMasterId xmlns:r="http://schemas.openxmlformats.org/officeDocument/2006/relationships" r:id="Ref39fe3191e0499d"/>
+    <p:notesMasterId xmlns:r="http://schemas.openxmlformats.org/officeDocument/2006/relationships" r:id="R95c727c5f80f48fa"/>
   </p:notesMasterIdLst>
   <p:sldIdLst>
-    <p:sldId xmlns:r="http://schemas.openxmlformats.org/officeDocument/2006/relationships" id="256" r:id="Re799b98d647a482f"/>
-    <p:sldId xmlns:r="http://schemas.openxmlformats.org/officeDocument/2006/relationships" id="257" r:id="Re01baa6555954629"/>
-    <p:sldId xmlns:r="http://schemas.openxmlformats.org/officeDocument/2006/relationships" id="258" r:id="Reb914350d691433f"/>
-    <p:sldId xmlns:r="http://schemas.openxmlformats.org/officeDocument/2006/relationships" id="259" r:id="Rdf61e5be19284446"/>
-    <p:sldId xmlns:r="http://schemas.openxmlformats.org/officeDocument/2006/relationships" id="260" r:id="Rf0acc668a6b94472"/>
-    <p:sldId xmlns:r="http://schemas.openxmlformats.org/officeDocument/2006/relationships" id="261" r:id="Ra12e520267f94827"/>
-    <p:sldId xmlns:r="http://schemas.openxmlformats.org/officeDocument/2006/relationships" id="262" r:id="Rea493556a6544191"/>
-    <p:sldId xmlns:r="http://schemas.openxmlformats.org/officeDocument/2006/relationships" id="263" r:id="R7ed46150f7a64ba1"/>
-    <p:sldId xmlns:r="http://schemas.openxmlformats.org/officeDocument/2006/relationships" id="264" r:id="R2c00ed6db1ca4f36"/>
-    <p:sldId xmlns:r="http://schemas.openxmlformats.org/officeDocument/2006/relationships" id="265" r:id="Rcc49b3d153444e51"/>
-    <p:sldId xmlns:r="http://schemas.openxmlformats.org/officeDocument/2006/relationships" id="266" r:id="Raa08f0d3ddc6471e"/>
-    <p:sldId xmlns:r="http://schemas.openxmlformats.org/officeDocument/2006/relationships" id="267" r:id="Rc21efe5cb2d14797"/>
+    <p:sldId xmlns:r="http://schemas.openxmlformats.org/officeDocument/2006/relationships" id="256" r:id="Rb027d599a8d64a28"/>
+    <p:sldId xmlns:r="http://schemas.openxmlformats.org/officeDocument/2006/relationships" id="257" r:id="R063f3d42666e4685"/>
+    <p:sldId xmlns:r="http://schemas.openxmlformats.org/officeDocument/2006/relationships" id="258" r:id="R5155c33877aa460e"/>
+    <p:sldId xmlns:r="http://schemas.openxmlformats.org/officeDocument/2006/relationships" id="259" r:id="R25f29840160c413c"/>
+    <p:sldId xmlns:r="http://schemas.openxmlformats.org/officeDocument/2006/relationships" id="260" r:id="R76d90a0df7fc4557"/>
+    <p:sldId xmlns:r="http://schemas.openxmlformats.org/officeDocument/2006/relationships" id="261" r:id="Rc9ac68f3364a43bd"/>
+    <p:sldId xmlns:r="http://schemas.openxmlformats.org/officeDocument/2006/relationships" id="262" r:id="Re02675e53d234ded"/>
+    <p:sldId xmlns:r="http://schemas.openxmlformats.org/officeDocument/2006/relationships" id="263" r:id="Rb07d7aea22a34c2c"/>
+    <p:sldId xmlns:r="http://schemas.openxmlformats.org/officeDocument/2006/relationships" id="264" r:id="Rcd48f2bb60d94e81"/>
+    <p:sldId xmlns:r="http://schemas.openxmlformats.org/officeDocument/2006/relationships" id="265" r:id="Ra85ef529a1bc443e"/>
+    <p:sldId xmlns:r="http://schemas.openxmlformats.org/officeDocument/2006/relationships" id="266" r:id="Rfe6021d1b114485d"/>
+    <p:sldId xmlns:r="http://schemas.openxmlformats.org/officeDocument/2006/relationships" id="267" r:id="Rb6f2ffd5b8e84896"/>
   </p:sldIdLst>
   <p:sldSz cx="12192000" cy="6858000"/>
   <p:notesSz cx="6858000" cy="9144000"/>
@@ -873,7 +873,7 @@
           <a:lstStyle xmlns:a="http://schemas.openxmlformats.org/drawingml/2006/main"/>
           <a:p xmlns:a="http://schemas.openxmlformats.org/drawingml/2006/main">
             <a:r>
-              <a:t>I do. Reveal the question, setup and each calculation stage one click at a time. Pupils watch before copying. Model answer: 0.36 and 36%.</a:t>
+              <a:t>I do. Reveal the question, then reveal each mathematical change one click at a time. Point to the numbers and operation that changed before moving to the next line. Final answer: 0.36 and 36%.</a:t>
             </a:r>
           </a:p>
         </p:txBody>
@@ -1291,7 +1291,7 @@
   </p:cSld>
   <p:clrMap bg1="lt1" tx1="dk1" bg2="lt2" tx2="dk2" accent1="accent1" accent2="accent2" accent3="accent3" accent4="accent4" accent5="accent5" accent6="accent6" hlink="hlink" folHlink="folHlink"/>
   <p:sldLayoutIdLst>
-    <p:sldLayoutId xmlns:r="http://schemas.openxmlformats.org/officeDocument/2006/relationships" id="2147483649" r:id="Rfeb041d5307d42d8"/>
+    <p:sldLayoutId xmlns:r="http://schemas.openxmlformats.org/officeDocument/2006/relationships" id="2147483649" r:id="R7cdc62f2251f4e63"/>
   </p:sldLayoutIdLst>
   <p:txStyles>
     <p:titleStyle>
@@ -1842,7 +1842,7 @@
           <p:cNvPr id="12" name="">
             <a:extLst xmlns:a="http://schemas.openxmlformats.org/drawingml/2006/main">
               <a:ext uri="{FF2B5EF4-FFF2-40B4-BE49-F238E27FC236}">
-                <a16:creationId xmlns:a16="http://schemas.microsoft.com/office/drawing/2014/main" id="{89AC492F-CB87-4633-937C-9F8D0660F53F}"/>
+                <a16:creationId xmlns:a16="http://schemas.microsoft.com/office/drawing/2014/main" id="{4C8C3422-DD9E-4CC2-B751-5B50A7B829B1}"/>
               </a:ext>
             </a:extLst>
           </p:cNvPr>
@@ -1874,7 +1874,7 @@
           <p:cNvPr id="2" name="">
             <a:extLst xmlns:a="http://schemas.openxmlformats.org/drawingml/2006/main">
               <a:ext uri="{FF2B5EF4-FFF2-40B4-BE49-F238E27FC236}">
-                <a16:creationId xmlns:a16="http://schemas.microsoft.com/office/drawing/2014/main" id="{8CC85FD2-0F4A-4EBC-BA7D-E454C9F421ED}"/>
+                <a16:creationId xmlns:a16="http://schemas.microsoft.com/office/drawing/2014/main" id="{1663E2FB-42D9-4003-8F3A-E8C681A2975D}"/>
               </a:ext>
             </a:extLst>
           </p:cNvPr>
@@ -1931,7 +1931,7 @@
           <p:cNvPr id="3" name="">
             <a:extLst xmlns:a="http://schemas.openxmlformats.org/drawingml/2006/main">
               <a:ext uri="{FF2B5EF4-FFF2-40B4-BE49-F238E27FC236}">
-                <a16:creationId xmlns:a16="http://schemas.microsoft.com/office/drawing/2014/main" id="{B1FDE5A6-6DE9-4423-A0B4-4131AA92BB03}"/>
+                <a16:creationId xmlns:a16="http://schemas.microsoft.com/office/drawing/2014/main" id="{5EAC205A-251F-44E0-A54B-11A1F87EB1D5}"/>
               </a:ext>
             </a:extLst>
           </p:cNvPr>
@@ -1965,7 +1965,7 @@
           <p:cNvPr id="4" name="">
             <a:extLst xmlns:a="http://schemas.openxmlformats.org/drawingml/2006/main">
               <a:ext uri="{FF2B5EF4-FFF2-40B4-BE49-F238E27FC236}">
-                <a16:creationId xmlns:a16="http://schemas.microsoft.com/office/drawing/2014/main" id="{60456FF1-AE6A-4635-9008-E96ABA28279B}"/>
+                <a16:creationId xmlns:a16="http://schemas.microsoft.com/office/drawing/2014/main" id="{B4B197EB-C169-4A2C-80E8-0D112CF52FC8}"/>
               </a:ext>
             </a:extLst>
           </p:cNvPr>
@@ -2022,7 +2022,7 @@
           <p:cNvPr id="5" name="">
             <a:extLst xmlns:a="http://schemas.openxmlformats.org/drawingml/2006/main">
               <a:ext uri="{FF2B5EF4-FFF2-40B4-BE49-F238E27FC236}">
-                <a16:creationId xmlns:a16="http://schemas.microsoft.com/office/drawing/2014/main" id="{CA357014-17DD-4640-B031-450841639C1C}"/>
+                <a16:creationId xmlns:a16="http://schemas.microsoft.com/office/drawing/2014/main" id="{33F254CF-B6CD-4B40-8925-739CB0F34D8C}"/>
               </a:ext>
             </a:extLst>
           </p:cNvPr>
@@ -2079,7 +2079,7 @@
           <p:cNvPr id="6" name="">
             <a:extLst xmlns:a="http://schemas.openxmlformats.org/drawingml/2006/main">
               <a:ext uri="{FF2B5EF4-FFF2-40B4-BE49-F238E27FC236}">
-                <a16:creationId xmlns:a16="http://schemas.microsoft.com/office/drawing/2014/main" id="{83292D68-EB6D-4311-88F1-15205C6CAE40}"/>
+                <a16:creationId xmlns:a16="http://schemas.microsoft.com/office/drawing/2014/main" id="{96369A49-98A7-4C79-B487-830D33FC1C09}"/>
               </a:ext>
             </a:extLst>
           </p:cNvPr>
@@ -2113,7 +2113,7 @@
           <p:cNvPr id="7" name="">
             <a:extLst xmlns:a="http://schemas.openxmlformats.org/drawingml/2006/main">
               <a:ext uri="{FF2B5EF4-FFF2-40B4-BE49-F238E27FC236}">
-                <a16:creationId xmlns:a16="http://schemas.microsoft.com/office/drawing/2014/main" id="{05640EC2-2F45-4216-96B7-6E3A1F226F75}"/>
+                <a16:creationId xmlns:a16="http://schemas.microsoft.com/office/drawing/2014/main" id="{35B39629-9A3B-4045-AA24-26603E6CE895}"/>
               </a:ext>
             </a:extLst>
           </p:cNvPr>
@@ -2170,7 +2170,7 @@
           <p:cNvPr id="8" name="">
             <a:extLst xmlns:a="http://schemas.openxmlformats.org/drawingml/2006/main">
               <a:ext uri="{FF2B5EF4-FFF2-40B4-BE49-F238E27FC236}">
-                <a16:creationId xmlns:a16="http://schemas.microsoft.com/office/drawing/2014/main" id="{DB8B69E4-0F65-495D-B751-ADFB6A225B6D}"/>
+                <a16:creationId xmlns:a16="http://schemas.microsoft.com/office/drawing/2014/main" id="{248FDF4A-166C-484E-AD97-F6C8CF186292}"/>
               </a:ext>
             </a:extLst>
           </p:cNvPr>
@@ -2227,7 +2227,7 @@
           <p:cNvPr id="9" name="">
             <a:extLst xmlns:a="http://schemas.openxmlformats.org/drawingml/2006/main">
               <a:ext uri="{FF2B5EF4-FFF2-40B4-BE49-F238E27FC236}">
-                <a16:creationId xmlns:a16="http://schemas.microsoft.com/office/drawing/2014/main" id="{B99B4A6F-3688-4F0A-B965-A1F2BBD5C3F3}"/>
+                <a16:creationId xmlns:a16="http://schemas.microsoft.com/office/drawing/2014/main" id="{B8AD11D1-13F0-494D-ABCD-F1402F4AA62C}"/>
               </a:ext>
             </a:extLst>
           </p:cNvPr>
@@ -2284,7 +2284,7 @@
           <p:cNvPr id="10" name="">
             <a:extLst xmlns:a="http://schemas.openxmlformats.org/drawingml/2006/main">
               <a:ext uri="{FF2B5EF4-FFF2-40B4-BE49-F238E27FC236}">
-                <a16:creationId xmlns:a16="http://schemas.microsoft.com/office/drawing/2014/main" id="{BA8B5396-FCE9-486E-9B29-CE538C67AB19}"/>
+                <a16:creationId xmlns:a16="http://schemas.microsoft.com/office/drawing/2014/main" id="{54E1C337-B711-41BF-ACB7-725DE1BAED75}"/>
               </a:ext>
             </a:extLst>
           </p:cNvPr>
@@ -2341,7 +2341,7 @@
           <p:cNvPr id="11" name="">
             <a:extLst xmlns:a="http://schemas.openxmlformats.org/drawingml/2006/main">
               <a:ext uri="{FF2B5EF4-FFF2-40B4-BE49-F238E27FC236}">
-                <a16:creationId xmlns:a16="http://schemas.microsoft.com/office/drawing/2014/main" id="{E606BFE8-6298-483B-A1B1-A99CF5E91CD5}"/>
+                <a16:creationId xmlns:a16="http://schemas.microsoft.com/office/drawing/2014/main" id="{3A1F8F8C-A00A-42D0-9505-043CA187951B}"/>
               </a:ext>
             </a:extLst>
           </p:cNvPr>
@@ -2396,7 +2396,7 @@
     </p:spTree>
     <p:extLst>
       <p:ext uri="{BB962C8B-B14F-4D97-AF65-F5344CB8AC3E}">
-        <p14:creationId xmlns:p14="http://schemas.microsoft.com/office/powerpoint/2010/main" val="1634543839"/>
+        <p14:creationId xmlns:p14="http://schemas.microsoft.com/office/powerpoint/2010/main" val="952864990"/>
       </p:ext>
     </p:extLst>
   </p:cSld>
@@ -2427,7 +2427,7 @@
           <p:cNvPr id="14" name="">
             <a:extLst xmlns:a="http://schemas.openxmlformats.org/drawingml/2006/main">
               <a:ext uri="{FF2B5EF4-FFF2-40B4-BE49-F238E27FC236}">
-                <a16:creationId xmlns:a16="http://schemas.microsoft.com/office/drawing/2014/main" id="{57DA308C-BF09-4A8B-8A66-5DCFA4A955E2}"/>
+                <a16:creationId xmlns:a16="http://schemas.microsoft.com/office/drawing/2014/main" id="{4BA09300-E0A2-4F86-A39B-62625B8D43D8}"/>
               </a:ext>
             </a:extLst>
           </p:cNvPr>
@@ -2459,7 +2459,7 @@
           <p:cNvPr id="2" name="">
             <a:extLst xmlns:a="http://schemas.openxmlformats.org/drawingml/2006/main">
               <a:ext uri="{FF2B5EF4-FFF2-40B4-BE49-F238E27FC236}">
-                <a16:creationId xmlns:a16="http://schemas.microsoft.com/office/drawing/2014/main" id="{DAA5FCE2-A830-4446-941E-C6E6CCC2D753}"/>
+                <a16:creationId xmlns:a16="http://schemas.microsoft.com/office/drawing/2014/main" id="{FAB619B2-D98D-4826-AB66-46AF71E02B13}"/>
               </a:ext>
             </a:extLst>
           </p:cNvPr>
@@ -2516,7 +2516,7 @@
           <p:cNvPr id="3" name="">
             <a:extLst xmlns:a="http://schemas.openxmlformats.org/drawingml/2006/main">
               <a:ext uri="{FF2B5EF4-FFF2-40B4-BE49-F238E27FC236}">
-                <a16:creationId xmlns:a16="http://schemas.microsoft.com/office/drawing/2014/main" id="{A75B4CF2-6588-4527-BCFB-54017FD04764}"/>
+                <a16:creationId xmlns:a16="http://schemas.microsoft.com/office/drawing/2014/main" id="{E96DEB3F-D779-4D70-977D-61E038163A61}"/>
               </a:ext>
             </a:extLst>
           </p:cNvPr>
@@ -2548,7 +2548,7 @@
           <p:cNvPr id="4" name="">
             <a:extLst xmlns:a="http://schemas.openxmlformats.org/drawingml/2006/main">
               <a:ext uri="{FF2B5EF4-FFF2-40B4-BE49-F238E27FC236}">
-                <a16:creationId xmlns:a16="http://schemas.microsoft.com/office/drawing/2014/main" id="{97E967CB-25D6-4DD6-8A31-E9090BC128AD}"/>
+                <a16:creationId xmlns:a16="http://schemas.microsoft.com/office/drawing/2014/main" id="{05F0E547-0860-4C0E-9412-AC39DFE5EAAC}"/>
               </a:ext>
             </a:extLst>
           </p:cNvPr>
@@ -2605,7 +2605,7 @@
           <p:cNvPr id="5" name="">
             <a:extLst xmlns:a="http://schemas.openxmlformats.org/drawingml/2006/main">
               <a:ext uri="{FF2B5EF4-FFF2-40B4-BE49-F238E27FC236}">
-                <a16:creationId xmlns:a16="http://schemas.microsoft.com/office/drawing/2014/main" id="{7F48A699-FBF4-437F-8BFB-02606993C88F}"/>
+                <a16:creationId xmlns:a16="http://schemas.microsoft.com/office/drawing/2014/main" id="{093B8DA9-5002-4281-B27E-08FBA3942300}"/>
               </a:ext>
             </a:extLst>
           </p:cNvPr>
@@ -2662,7 +2662,7 @@
           <p:cNvPr id="6" name="">
             <a:extLst xmlns:a="http://schemas.openxmlformats.org/drawingml/2006/main">
               <a:ext uri="{FF2B5EF4-FFF2-40B4-BE49-F238E27FC236}">
-                <a16:creationId xmlns:a16="http://schemas.microsoft.com/office/drawing/2014/main" id="{106E931D-9044-46F4-8297-747AF87631BB}"/>
+                <a16:creationId xmlns:a16="http://schemas.microsoft.com/office/drawing/2014/main" id="{88F7C8BC-BBF5-4FEC-BE90-03B00C873060}"/>
               </a:ext>
             </a:extLst>
           </p:cNvPr>
@@ -2719,7 +2719,7 @@
           <p:cNvPr id="7" name="">
             <a:extLst xmlns:a="http://schemas.openxmlformats.org/drawingml/2006/main">
               <a:ext uri="{FF2B5EF4-FFF2-40B4-BE49-F238E27FC236}">
-                <a16:creationId xmlns:a16="http://schemas.microsoft.com/office/drawing/2014/main" id="{4FE1027F-18D3-4EDF-80F4-5406842AB4F4}"/>
+                <a16:creationId xmlns:a16="http://schemas.microsoft.com/office/drawing/2014/main" id="{759F8965-6932-4A3C-8F8A-ADDB8380C7D4}"/>
               </a:ext>
             </a:extLst>
           </p:cNvPr>
@@ -2751,7 +2751,7 @@
           <p:cNvPr id="8" name="">
             <a:extLst xmlns:a="http://schemas.openxmlformats.org/drawingml/2006/main">
               <a:ext uri="{FF2B5EF4-FFF2-40B4-BE49-F238E27FC236}">
-                <a16:creationId xmlns:a16="http://schemas.microsoft.com/office/drawing/2014/main" id="{8AB3057D-B463-4B65-BD9B-C8324BA76D47}"/>
+                <a16:creationId xmlns:a16="http://schemas.microsoft.com/office/drawing/2014/main" id="{68DA4019-E111-43A1-A705-4FE1C042D8F6}"/>
               </a:ext>
             </a:extLst>
           </p:cNvPr>
@@ -2808,7 +2808,7 @@
           <p:cNvPr id="9" name="">
             <a:extLst xmlns:a="http://schemas.openxmlformats.org/drawingml/2006/main">
               <a:ext uri="{FF2B5EF4-FFF2-40B4-BE49-F238E27FC236}">
-                <a16:creationId xmlns:a16="http://schemas.microsoft.com/office/drawing/2014/main" id="{E6A6BD38-4295-4790-BADF-C6BC875A02BC}"/>
+                <a16:creationId xmlns:a16="http://schemas.microsoft.com/office/drawing/2014/main" id="{167DAFF1-706C-49FC-BBE3-73BF0C9EFB15}"/>
               </a:ext>
             </a:extLst>
           </p:cNvPr>
@@ -2865,7 +2865,7 @@
           <p:cNvPr id="10" name="">
             <a:extLst xmlns:a="http://schemas.openxmlformats.org/drawingml/2006/main">
               <a:ext uri="{FF2B5EF4-FFF2-40B4-BE49-F238E27FC236}">
-                <a16:creationId xmlns:a16="http://schemas.microsoft.com/office/drawing/2014/main" id="{071B690D-3E34-4ABB-881E-C97F642685E2}"/>
+                <a16:creationId xmlns:a16="http://schemas.microsoft.com/office/drawing/2014/main" id="{8F76FADA-0037-4DE4-9527-D4541BC2DB84}"/>
               </a:ext>
             </a:extLst>
           </p:cNvPr>
@@ -2922,7 +2922,7 @@
           <p:cNvPr id="11" name="">
             <a:extLst xmlns:a="http://schemas.openxmlformats.org/drawingml/2006/main">
               <a:ext uri="{FF2B5EF4-FFF2-40B4-BE49-F238E27FC236}">
-                <a16:creationId xmlns:a16="http://schemas.microsoft.com/office/drawing/2014/main" id="{686F46F3-4B06-4BAF-8564-094C934FBD98}"/>
+                <a16:creationId xmlns:a16="http://schemas.microsoft.com/office/drawing/2014/main" id="{45629D20-AF65-4CC9-B863-559693ED8C7A}"/>
               </a:ext>
             </a:extLst>
           </p:cNvPr>
@@ -2979,7 +2979,7 @@
           <p:cNvPr id="12" name="">
             <a:extLst xmlns:a="http://schemas.openxmlformats.org/drawingml/2006/main">
               <a:ext uri="{FF2B5EF4-FFF2-40B4-BE49-F238E27FC236}">
-                <a16:creationId xmlns:a16="http://schemas.microsoft.com/office/drawing/2014/main" id="{CB99C725-4AC2-4855-9420-C39DB3D48138}"/>
+                <a16:creationId xmlns:a16="http://schemas.microsoft.com/office/drawing/2014/main" id="{9A13498E-9721-463E-999C-CA14B043E2BC}"/>
               </a:ext>
             </a:extLst>
           </p:cNvPr>
@@ -3036,7 +3036,7 @@
           <p:cNvPr id="13" name="">
             <a:extLst xmlns:a="http://schemas.openxmlformats.org/drawingml/2006/main">
               <a:ext uri="{FF2B5EF4-FFF2-40B4-BE49-F238E27FC236}">
-                <a16:creationId xmlns:a16="http://schemas.microsoft.com/office/drawing/2014/main" id="{A0FBB652-32F1-4AF0-AFA4-52D03E045AAE}"/>
+                <a16:creationId xmlns:a16="http://schemas.microsoft.com/office/drawing/2014/main" id="{CF898830-C275-487D-9CBC-EC9C834FC4BB}"/>
               </a:ext>
             </a:extLst>
           </p:cNvPr>
@@ -3091,7 +3091,7 @@
     </p:spTree>
     <p:extLst>
       <p:ext uri="{BB962C8B-B14F-4D97-AF65-F5344CB8AC3E}">
-        <p14:creationId xmlns:p14="http://schemas.microsoft.com/office/powerpoint/2010/main" val="1546192427"/>
+        <p14:creationId xmlns:p14="http://schemas.microsoft.com/office/powerpoint/2010/main" val="1383235419"/>
       </p:ext>
     </p:extLst>
   </p:cSld>
@@ -3292,7 +3292,7 @@
           <p:cNvPr id="19" name="">
             <a:extLst xmlns:a="http://schemas.openxmlformats.org/drawingml/2006/main">
               <a:ext uri="{FF2B5EF4-FFF2-40B4-BE49-F238E27FC236}">
-                <a16:creationId xmlns:a16="http://schemas.microsoft.com/office/drawing/2014/main" id="{97C3D1B8-D7CB-4344-A7CD-437A4171A0B0}"/>
+                <a16:creationId xmlns:a16="http://schemas.microsoft.com/office/drawing/2014/main" id="{26D08B66-1044-4F6F-99B2-9E1B85814AE1}"/>
               </a:ext>
             </a:extLst>
           </p:cNvPr>
@@ -3324,7 +3324,7 @@
           <p:cNvPr id="2" name="">
             <a:extLst xmlns:a="http://schemas.openxmlformats.org/drawingml/2006/main">
               <a:ext uri="{FF2B5EF4-FFF2-40B4-BE49-F238E27FC236}">
-                <a16:creationId xmlns:a16="http://schemas.microsoft.com/office/drawing/2014/main" id="{A5243C04-D4C7-4762-94CC-9B3EA4917005}"/>
+                <a16:creationId xmlns:a16="http://schemas.microsoft.com/office/drawing/2014/main" id="{D789E0E5-E85C-4654-AF4F-AF241ED72A1F}"/>
               </a:ext>
             </a:extLst>
           </p:cNvPr>
@@ -3381,7 +3381,7 @@
           <p:cNvPr id="3" name="">
             <a:extLst xmlns:a="http://schemas.openxmlformats.org/drawingml/2006/main">
               <a:ext uri="{FF2B5EF4-FFF2-40B4-BE49-F238E27FC236}">
-                <a16:creationId xmlns:a16="http://schemas.microsoft.com/office/drawing/2014/main" id="{DBB30D92-4D03-417F-B01D-D3535FF0A89E}"/>
+                <a16:creationId xmlns:a16="http://schemas.microsoft.com/office/drawing/2014/main" id="{8090564E-0EF4-4A1B-9F62-0E09A3341182}"/>
               </a:ext>
             </a:extLst>
           </p:cNvPr>
@@ -3413,7 +3413,7 @@
           <p:cNvPr id="4" name="">
             <a:extLst xmlns:a="http://schemas.openxmlformats.org/drawingml/2006/main">
               <a:ext uri="{FF2B5EF4-FFF2-40B4-BE49-F238E27FC236}">
-                <a16:creationId xmlns:a16="http://schemas.microsoft.com/office/drawing/2014/main" id="{EA66C097-1930-459B-BA7C-5859E7956BE0}"/>
+                <a16:creationId xmlns:a16="http://schemas.microsoft.com/office/drawing/2014/main" id="{0C2D978B-A172-4CC9-AB24-389106AD0B43}"/>
               </a:ext>
             </a:extLst>
           </p:cNvPr>
@@ -3470,7 +3470,7 @@
           <p:cNvPr id="5" name="">
             <a:extLst xmlns:a="http://schemas.openxmlformats.org/drawingml/2006/main">
               <a:ext uri="{FF2B5EF4-FFF2-40B4-BE49-F238E27FC236}">
-                <a16:creationId xmlns:a16="http://schemas.microsoft.com/office/drawing/2014/main" id="{C69639D1-7147-4391-92E8-2DBA7454AB95}"/>
+                <a16:creationId xmlns:a16="http://schemas.microsoft.com/office/drawing/2014/main" id="{B5FC8677-B67A-43F5-9265-E42C0CD792A1}"/>
               </a:ext>
             </a:extLst>
           </p:cNvPr>
@@ -3527,7 +3527,7 @@
           <p:cNvPr id="6" name="">
             <a:extLst xmlns:a="http://schemas.openxmlformats.org/drawingml/2006/main">
               <a:ext uri="{FF2B5EF4-FFF2-40B4-BE49-F238E27FC236}">
-                <a16:creationId xmlns:a16="http://schemas.microsoft.com/office/drawing/2014/main" id="{81959F0A-95F3-46E9-AB01-9217A79E61FC}"/>
+                <a16:creationId xmlns:a16="http://schemas.microsoft.com/office/drawing/2014/main" id="{CD99AD25-E673-4C62-8085-6C81316D277E}"/>
               </a:ext>
             </a:extLst>
           </p:cNvPr>
@@ -3584,7 +3584,7 @@
           <p:cNvPr id="7" name="">
             <a:extLst xmlns:a="http://schemas.openxmlformats.org/drawingml/2006/main">
               <a:ext uri="{FF2B5EF4-FFF2-40B4-BE49-F238E27FC236}">
-                <a16:creationId xmlns:a16="http://schemas.microsoft.com/office/drawing/2014/main" id="{CBD5CA4A-A758-4AFF-9FFC-51DCF2DD76CB}"/>
+                <a16:creationId xmlns:a16="http://schemas.microsoft.com/office/drawing/2014/main" id="{B44463AB-1759-4025-A794-2D94124F81A1}"/>
               </a:ext>
             </a:extLst>
           </p:cNvPr>
@@ -3616,7 +3616,7 @@
           <p:cNvPr id="8" name="">
             <a:extLst xmlns:a="http://schemas.openxmlformats.org/drawingml/2006/main">
               <a:ext uri="{FF2B5EF4-FFF2-40B4-BE49-F238E27FC236}">
-                <a16:creationId xmlns:a16="http://schemas.microsoft.com/office/drawing/2014/main" id="{26BB5B76-E500-476F-B388-89A9E9297693}"/>
+                <a16:creationId xmlns:a16="http://schemas.microsoft.com/office/drawing/2014/main" id="{421110A5-0C6C-4374-B0BC-137551FA0EBA}"/>
               </a:ext>
             </a:extLst>
           </p:cNvPr>
@@ -3673,7 +3673,7 @@
           <p:cNvPr id="9" name="">
             <a:extLst xmlns:a="http://schemas.openxmlformats.org/drawingml/2006/main">
               <a:ext uri="{FF2B5EF4-FFF2-40B4-BE49-F238E27FC236}">
-                <a16:creationId xmlns:a16="http://schemas.microsoft.com/office/drawing/2014/main" id="{B38277E1-DCFC-4311-859A-31F47938E950}"/>
+                <a16:creationId xmlns:a16="http://schemas.microsoft.com/office/drawing/2014/main" id="{924E554F-3D15-4C3B-9F1C-68A2DA0FB1B7}"/>
               </a:ext>
             </a:extLst>
           </p:cNvPr>
@@ -3730,7 +3730,7 @@
           <p:cNvPr id="10" name="">
             <a:extLst xmlns:a="http://schemas.openxmlformats.org/drawingml/2006/main">
               <a:ext uri="{FF2B5EF4-FFF2-40B4-BE49-F238E27FC236}">
-                <a16:creationId xmlns:a16="http://schemas.microsoft.com/office/drawing/2014/main" id="{1021352C-8AFB-4C38-9A0D-02C05FBE5E0C}"/>
+                <a16:creationId xmlns:a16="http://schemas.microsoft.com/office/drawing/2014/main" id="{971F5489-C7C4-43A8-90B7-123FF974A9DF}"/>
               </a:ext>
             </a:extLst>
           </p:cNvPr>
@@ -3787,7 +3787,7 @@
           <p:cNvPr id="11" name="">
             <a:extLst xmlns:a="http://schemas.openxmlformats.org/drawingml/2006/main">
               <a:ext uri="{FF2B5EF4-FFF2-40B4-BE49-F238E27FC236}">
-                <a16:creationId xmlns:a16="http://schemas.microsoft.com/office/drawing/2014/main" id="{10CAE4A0-0B05-42D2-B5DA-12087D8B8140}"/>
+                <a16:creationId xmlns:a16="http://schemas.microsoft.com/office/drawing/2014/main" id="{C8579694-3308-4F7E-B258-5CC5C5D2AA84}"/>
               </a:ext>
             </a:extLst>
           </p:cNvPr>
@@ -3821,7 +3821,7 @@
           <p:cNvPr id="12" name="">
             <a:extLst xmlns:a="http://schemas.openxmlformats.org/drawingml/2006/main">
               <a:ext uri="{FF2B5EF4-FFF2-40B4-BE49-F238E27FC236}">
-                <a16:creationId xmlns:a16="http://schemas.microsoft.com/office/drawing/2014/main" id="{ED73FEB8-1EFC-440D-8B77-C2351E906A70}"/>
+                <a16:creationId xmlns:a16="http://schemas.microsoft.com/office/drawing/2014/main" id="{CF3C4CF1-86CC-4E10-923C-615551CA17B4}"/>
               </a:ext>
             </a:extLst>
           </p:cNvPr>
@@ -3878,7 +3878,7 @@
           <p:cNvPr id="13" name="">
             <a:extLst xmlns:a="http://schemas.openxmlformats.org/drawingml/2006/main">
               <a:ext uri="{FF2B5EF4-FFF2-40B4-BE49-F238E27FC236}">
-                <a16:creationId xmlns:a16="http://schemas.microsoft.com/office/drawing/2014/main" id="{E236BA7E-9560-4AED-A3F4-C4EA7CFA36E8}"/>
+                <a16:creationId xmlns:a16="http://schemas.microsoft.com/office/drawing/2014/main" id="{5E60CA78-1DEE-4653-ADA8-C7B73D52763B}"/>
               </a:ext>
             </a:extLst>
           </p:cNvPr>
@@ -3935,7 +3935,7 @@
           <p:cNvPr id="14" name="">
             <a:extLst xmlns:a="http://schemas.openxmlformats.org/drawingml/2006/main">
               <a:ext uri="{FF2B5EF4-FFF2-40B4-BE49-F238E27FC236}">
-                <a16:creationId xmlns:a16="http://schemas.microsoft.com/office/drawing/2014/main" id="{645426B9-12BD-437E-8EE0-08D8C901F988}"/>
+                <a16:creationId xmlns:a16="http://schemas.microsoft.com/office/drawing/2014/main" id="{BEFE8067-1E27-4E9C-8840-F161F03131D4}"/>
               </a:ext>
             </a:extLst>
           </p:cNvPr>
@@ -3992,7 +3992,7 @@
           <p:cNvPr id="15" name="">
             <a:extLst xmlns:a="http://schemas.openxmlformats.org/drawingml/2006/main">
               <a:ext uri="{FF2B5EF4-FFF2-40B4-BE49-F238E27FC236}">
-                <a16:creationId xmlns:a16="http://schemas.microsoft.com/office/drawing/2014/main" id="{F0C75836-1099-4607-A45A-E7E5A7EB80DE}"/>
+                <a16:creationId xmlns:a16="http://schemas.microsoft.com/office/drawing/2014/main" id="{8D4A0681-31B2-4184-9C32-6BBF13F2D06F}"/>
               </a:ext>
             </a:extLst>
           </p:cNvPr>
@@ -4026,7 +4026,7 @@
           <p:cNvPr id="16" name="">
             <a:extLst xmlns:a="http://schemas.openxmlformats.org/drawingml/2006/main">
               <a:ext uri="{FF2B5EF4-FFF2-40B4-BE49-F238E27FC236}">
-                <a16:creationId xmlns:a16="http://schemas.microsoft.com/office/drawing/2014/main" id="{8D8484A0-B95F-4ABB-A638-F39ABE43246B}"/>
+                <a16:creationId xmlns:a16="http://schemas.microsoft.com/office/drawing/2014/main" id="{733F171D-8E9E-43F2-B7CA-8427ACC13723}"/>
               </a:ext>
             </a:extLst>
           </p:cNvPr>
@@ -4083,7 +4083,7 @@
           <p:cNvPr id="17" name="">
             <a:extLst xmlns:a="http://schemas.openxmlformats.org/drawingml/2006/main">
               <a:ext uri="{FF2B5EF4-FFF2-40B4-BE49-F238E27FC236}">
-                <a16:creationId xmlns:a16="http://schemas.microsoft.com/office/drawing/2014/main" id="{F22D99DF-0A46-4D50-B022-9645759AF39D}"/>
+                <a16:creationId xmlns:a16="http://schemas.microsoft.com/office/drawing/2014/main" id="{CAB01227-4D02-4D68-9C56-93B56E788EF0}"/>
               </a:ext>
             </a:extLst>
           </p:cNvPr>
@@ -4140,7 +4140,7 @@
           <p:cNvPr id="18" name="">
             <a:extLst xmlns:a="http://schemas.openxmlformats.org/drawingml/2006/main">
               <a:ext uri="{FF2B5EF4-FFF2-40B4-BE49-F238E27FC236}">
-                <a16:creationId xmlns:a16="http://schemas.microsoft.com/office/drawing/2014/main" id="{D72C7AD1-ADD1-4289-ADBA-7C7771683FCA}"/>
+                <a16:creationId xmlns:a16="http://schemas.microsoft.com/office/drawing/2014/main" id="{98AB78D8-735D-4306-BFEB-6F9E52293588}"/>
               </a:ext>
             </a:extLst>
           </p:cNvPr>
@@ -4195,7 +4195,7 @@
     </p:spTree>
     <p:extLst>
       <p:ext uri="{BB962C8B-B14F-4D97-AF65-F5344CB8AC3E}">
-        <p14:creationId xmlns:p14="http://schemas.microsoft.com/office/powerpoint/2010/main" val="1630123311"/>
+        <p14:creationId xmlns:p14="http://schemas.microsoft.com/office/powerpoint/2010/main" val="1253206858"/>
       </p:ext>
     </p:extLst>
   </p:cSld>
@@ -4350,7 +4350,7 @@
           <p:cNvPr id="23" name="">
             <a:extLst xmlns:a="http://schemas.openxmlformats.org/drawingml/2006/main">
               <a:ext uri="{FF2B5EF4-FFF2-40B4-BE49-F238E27FC236}">
-                <a16:creationId xmlns:a16="http://schemas.microsoft.com/office/drawing/2014/main" id="{EB4C45E6-6213-4BDA-A628-6BBCFAE11C1B}"/>
+                <a16:creationId xmlns:a16="http://schemas.microsoft.com/office/drawing/2014/main" id="{E72A3CF0-D4EF-4794-AAA7-61C4A0170819}"/>
               </a:ext>
             </a:extLst>
           </p:cNvPr>
@@ -4382,7 +4382,7 @@
           <p:cNvPr id="2" name="">
             <a:extLst xmlns:a="http://schemas.openxmlformats.org/drawingml/2006/main">
               <a:ext uri="{FF2B5EF4-FFF2-40B4-BE49-F238E27FC236}">
-                <a16:creationId xmlns:a16="http://schemas.microsoft.com/office/drawing/2014/main" id="{67620BAA-0AD8-491E-86D9-394930386191}"/>
+                <a16:creationId xmlns:a16="http://schemas.microsoft.com/office/drawing/2014/main" id="{821EB8B5-0DDD-4B85-BCFA-E34E10655ECD}"/>
               </a:ext>
             </a:extLst>
           </p:cNvPr>
@@ -4439,7 +4439,7 @@
           <p:cNvPr id="3" name="">
             <a:extLst xmlns:a="http://schemas.openxmlformats.org/drawingml/2006/main">
               <a:ext uri="{FF2B5EF4-FFF2-40B4-BE49-F238E27FC236}">
-                <a16:creationId xmlns:a16="http://schemas.microsoft.com/office/drawing/2014/main" id="{991F83F5-6795-4F90-ACFD-CA87D6A05A26}"/>
+                <a16:creationId xmlns:a16="http://schemas.microsoft.com/office/drawing/2014/main" id="{6C352EFB-3DCB-4034-A7DB-63C1254AD3F8}"/>
               </a:ext>
             </a:extLst>
           </p:cNvPr>
@@ -4471,7 +4471,7 @@
           <p:cNvPr id="4" name="">
             <a:extLst xmlns:a="http://schemas.openxmlformats.org/drawingml/2006/main">
               <a:ext uri="{FF2B5EF4-FFF2-40B4-BE49-F238E27FC236}">
-                <a16:creationId xmlns:a16="http://schemas.microsoft.com/office/drawing/2014/main" id="{71E023FC-F388-4FB1-B28D-288A81DFA407}"/>
+                <a16:creationId xmlns:a16="http://schemas.microsoft.com/office/drawing/2014/main" id="{29DE1DA7-402F-4325-9D49-11D8BFFDA83C}"/>
               </a:ext>
             </a:extLst>
           </p:cNvPr>
@@ -4528,7 +4528,7 @@
           <p:cNvPr id="5" name="">
             <a:extLst xmlns:a="http://schemas.openxmlformats.org/drawingml/2006/main">
               <a:ext uri="{FF2B5EF4-FFF2-40B4-BE49-F238E27FC236}">
-                <a16:creationId xmlns:a16="http://schemas.microsoft.com/office/drawing/2014/main" id="{C2D72591-9D84-4485-A7FD-51B466D27BBD}"/>
+                <a16:creationId xmlns:a16="http://schemas.microsoft.com/office/drawing/2014/main" id="{2497FC44-0305-477E-AC67-F16CF3FD0B4D}"/>
               </a:ext>
             </a:extLst>
           </p:cNvPr>
@@ -4585,7 +4585,7 @@
           <p:cNvPr id="6" name="">
             <a:extLst xmlns:a="http://schemas.openxmlformats.org/drawingml/2006/main">
               <a:ext uri="{FF2B5EF4-FFF2-40B4-BE49-F238E27FC236}">
-                <a16:creationId xmlns:a16="http://schemas.microsoft.com/office/drawing/2014/main" id="{829E676E-AC79-4C71-94BB-EE00A3EE36AC}"/>
+                <a16:creationId xmlns:a16="http://schemas.microsoft.com/office/drawing/2014/main" id="{38F0DB84-B17D-470E-985B-8C1E93DBD2C3}"/>
               </a:ext>
             </a:extLst>
           </p:cNvPr>
@@ -4642,7 +4642,7 @@
           <p:cNvPr id="7" name="">
             <a:extLst xmlns:a="http://schemas.openxmlformats.org/drawingml/2006/main">
               <a:ext uri="{FF2B5EF4-FFF2-40B4-BE49-F238E27FC236}">
-                <a16:creationId xmlns:a16="http://schemas.microsoft.com/office/drawing/2014/main" id="{67481DF7-EEE2-49F1-AE66-B57316CCAB5C}"/>
+                <a16:creationId xmlns:a16="http://schemas.microsoft.com/office/drawing/2014/main" id="{1DA9C7E5-BEF8-4719-AA6A-EB0712A82396}"/>
               </a:ext>
             </a:extLst>
           </p:cNvPr>
@@ -4674,7 +4674,7 @@
           <p:cNvPr id="8" name="">
             <a:extLst xmlns:a="http://schemas.openxmlformats.org/drawingml/2006/main">
               <a:ext uri="{FF2B5EF4-FFF2-40B4-BE49-F238E27FC236}">
-                <a16:creationId xmlns:a16="http://schemas.microsoft.com/office/drawing/2014/main" id="{1F8EFB9B-5786-4A5A-BBC4-235DC864499E}"/>
+                <a16:creationId xmlns:a16="http://schemas.microsoft.com/office/drawing/2014/main" id="{ADB2F788-6D72-4513-A7AF-B03B802247CB}"/>
               </a:ext>
             </a:extLst>
           </p:cNvPr>
@@ -4731,7 +4731,7 @@
           <p:cNvPr id="9" name="">
             <a:extLst xmlns:a="http://schemas.openxmlformats.org/drawingml/2006/main">
               <a:ext uri="{FF2B5EF4-FFF2-40B4-BE49-F238E27FC236}">
-                <a16:creationId xmlns:a16="http://schemas.microsoft.com/office/drawing/2014/main" id="{82278396-0DC4-4586-9FE0-8DB83B6B6230}"/>
+                <a16:creationId xmlns:a16="http://schemas.microsoft.com/office/drawing/2014/main" id="{C447F900-A442-4607-A967-375218CFE6D1}"/>
               </a:ext>
             </a:extLst>
           </p:cNvPr>
@@ -4788,7 +4788,7 @@
           <p:cNvPr id="10" name="">
             <a:extLst xmlns:a="http://schemas.openxmlformats.org/drawingml/2006/main">
               <a:ext uri="{FF2B5EF4-FFF2-40B4-BE49-F238E27FC236}">
-                <a16:creationId xmlns:a16="http://schemas.microsoft.com/office/drawing/2014/main" id="{CB2D50AC-68EE-45D3-B0BD-EF537F32C042}"/>
+                <a16:creationId xmlns:a16="http://schemas.microsoft.com/office/drawing/2014/main" id="{51879023-99C1-40E6-AFF9-56B935A62BF5}"/>
               </a:ext>
             </a:extLst>
           </p:cNvPr>
@@ -4822,7 +4822,7 @@
           <p:cNvPr id="11" name="">
             <a:extLst xmlns:a="http://schemas.openxmlformats.org/drawingml/2006/main">
               <a:ext uri="{FF2B5EF4-FFF2-40B4-BE49-F238E27FC236}">
-                <a16:creationId xmlns:a16="http://schemas.microsoft.com/office/drawing/2014/main" id="{F4E94074-EDA2-47CF-9AC8-5417FE554CF8}"/>
+                <a16:creationId xmlns:a16="http://schemas.microsoft.com/office/drawing/2014/main" id="{72360255-D8C4-4DEC-B7A5-2D41BCA8360B}"/>
               </a:ext>
             </a:extLst>
           </p:cNvPr>
@@ -4854,7 +4854,7 @@
           <p:cNvPr id="12" name="">
             <a:extLst xmlns:a="http://schemas.openxmlformats.org/drawingml/2006/main">
               <a:ext uri="{FF2B5EF4-FFF2-40B4-BE49-F238E27FC236}">
-                <a16:creationId xmlns:a16="http://schemas.microsoft.com/office/drawing/2014/main" id="{A6190912-92E2-4D98-9B7B-6154F20A080B}"/>
+                <a16:creationId xmlns:a16="http://schemas.microsoft.com/office/drawing/2014/main" id="{E578F9D2-6663-4EA7-BD07-7D32F786A194}"/>
               </a:ext>
             </a:extLst>
           </p:cNvPr>
@@ -4911,7 +4911,7 @@
           <p:cNvPr id="13" name="">
             <a:extLst xmlns:a="http://schemas.openxmlformats.org/drawingml/2006/main">
               <a:ext uri="{FF2B5EF4-FFF2-40B4-BE49-F238E27FC236}">
-                <a16:creationId xmlns:a16="http://schemas.microsoft.com/office/drawing/2014/main" id="{0D67D7A2-BFBD-4D12-B030-11E1EE0411A3}"/>
+                <a16:creationId xmlns:a16="http://schemas.microsoft.com/office/drawing/2014/main" id="{B223B77B-1E92-4665-92DC-52E91B3229B1}"/>
               </a:ext>
             </a:extLst>
           </p:cNvPr>
@@ -4968,7 +4968,7 @@
           <p:cNvPr id="14" name="">
             <a:extLst xmlns:a="http://schemas.openxmlformats.org/drawingml/2006/main">
               <a:ext uri="{FF2B5EF4-FFF2-40B4-BE49-F238E27FC236}">
-                <a16:creationId xmlns:a16="http://schemas.microsoft.com/office/drawing/2014/main" id="{9DCB84C6-1545-410C-B390-E7869604059F}"/>
+                <a16:creationId xmlns:a16="http://schemas.microsoft.com/office/drawing/2014/main" id="{623B79DF-6D50-4212-9665-5F1C0612AC26}"/>
               </a:ext>
             </a:extLst>
           </p:cNvPr>
@@ -5002,7 +5002,7 @@
           <p:cNvPr id="15" name="">
             <a:extLst xmlns:a="http://schemas.openxmlformats.org/drawingml/2006/main">
               <a:ext uri="{FF2B5EF4-FFF2-40B4-BE49-F238E27FC236}">
-                <a16:creationId xmlns:a16="http://schemas.microsoft.com/office/drawing/2014/main" id="{4F2BD08C-7E68-445A-9B0A-A14367A315A2}"/>
+                <a16:creationId xmlns:a16="http://schemas.microsoft.com/office/drawing/2014/main" id="{89A83F93-685F-4B67-9F85-6D3D8AD5DDDB}"/>
               </a:ext>
             </a:extLst>
           </p:cNvPr>
@@ -5034,7 +5034,7 @@
           <p:cNvPr id="16" name="">
             <a:extLst xmlns:a="http://schemas.openxmlformats.org/drawingml/2006/main">
               <a:ext uri="{FF2B5EF4-FFF2-40B4-BE49-F238E27FC236}">
-                <a16:creationId xmlns:a16="http://schemas.microsoft.com/office/drawing/2014/main" id="{7C134FFD-6367-4D43-B139-5946BB034194}"/>
+                <a16:creationId xmlns:a16="http://schemas.microsoft.com/office/drawing/2014/main" id="{3F3BC309-936C-4CC8-894B-EC52B47AAE8B}"/>
               </a:ext>
             </a:extLst>
           </p:cNvPr>
@@ -5091,7 +5091,7 @@
           <p:cNvPr id="17" name="">
             <a:extLst xmlns:a="http://schemas.openxmlformats.org/drawingml/2006/main">
               <a:ext uri="{FF2B5EF4-FFF2-40B4-BE49-F238E27FC236}">
-                <a16:creationId xmlns:a16="http://schemas.microsoft.com/office/drawing/2014/main" id="{2208946E-1937-4960-B114-674D305FD5FF}"/>
+                <a16:creationId xmlns:a16="http://schemas.microsoft.com/office/drawing/2014/main" id="{69C7646B-35B8-4997-811E-6169519F8120}"/>
               </a:ext>
             </a:extLst>
           </p:cNvPr>
@@ -5148,7 +5148,7 @@
           <p:cNvPr id="18" name="">
             <a:extLst xmlns:a="http://schemas.openxmlformats.org/drawingml/2006/main">
               <a:ext uri="{FF2B5EF4-FFF2-40B4-BE49-F238E27FC236}">
-                <a16:creationId xmlns:a16="http://schemas.microsoft.com/office/drawing/2014/main" id="{B453EAE8-A86D-4625-A486-F6678F52A373}"/>
+                <a16:creationId xmlns:a16="http://schemas.microsoft.com/office/drawing/2014/main" id="{0E9DA799-0406-4D16-A705-DF451957945D}"/>
               </a:ext>
             </a:extLst>
           </p:cNvPr>
@@ -5182,7 +5182,7 @@
           <p:cNvPr id="19" name="">
             <a:extLst xmlns:a="http://schemas.openxmlformats.org/drawingml/2006/main">
               <a:ext uri="{FF2B5EF4-FFF2-40B4-BE49-F238E27FC236}">
-                <a16:creationId xmlns:a16="http://schemas.microsoft.com/office/drawing/2014/main" id="{F9AE54A3-BD3C-4428-A169-79C66CC7A7FB}"/>
+                <a16:creationId xmlns:a16="http://schemas.microsoft.com/office/drawing/2014/main" id="{EE6C7C32-9EE2-4FC4-A26F-C322896C2A73}"/>
               </a:ext>
             </a:extLst>
           </p:cNvPr>
@@ -5214,7 +5214,7 @@
           <p:cNvPr id="20" name="">
             <a:extLst xmlns:a="http://schemas.openxmlformats.org/drawingml/2006/main">
               <a:ext uri="{FF2B5EF4-FFF2-40B4-BE49-F238E27FC236}">
-                <a16:creationId xmlns:a16="http://schemas.microsoft.com/office/drawing/2014/main" id="{22C41D9C-BCA0-4DCB-9A35-6A4DE1FAE67B}"/>
+                <a16:creationId xmlns:a16="http://schemas.microsoft.com/office/drawing/2014/main" id="{D93D5E4B-9465-42AF-AFBB-C1661C96D526}"/>
               </a:ext>
             </a:extLst>
           </p:cNvPr>
@@ -5271,7 +5271,7 @@
           <p:cNvPr id="21" name="">
             <a:extLst xmlns:a="http://schemas.openxmlformats.org/drawingml/2006/main">
               <a:ext uri="{FF2B5EF4-FFF2-40B4-BE49-F238E27FC236}">
-                <a16:creationId xmlns:a16="http://schemas.microsoft.com/office/drawing/2014/main" id="{F9BE54B6-5375-44D4-B6AE-B0497758F86B}"/>
+                <a16:creationId xmlns:a16="http://schemas.microsoft.com/office/drawing/2014/main" id="{E0054C2D-7CD3-4530-A9B0-4F4AEFD46755}"/>
               </a:ext>
             </a:extLst>
           </p:cNvPr>
@@ -5328,7 +5328,7 @@
           <p:cNvPr id="22" name="">
             <a:extLst xmlns:a="http://schemas.openxmlformats.org/drawingml/2006/main">
               <a:ext uri="{FF2B5EF4-FFF2-40B4-BE49-F238E27FC236}">
-                <a16:creationId xmlns:a16="http://schemas.microsoft.com/office/drawing/2014/main" id="{72D26F53-37AB-48B9-8D6C-96CBC91B448E}"/>
+                <a16:creationId xmlns:a16="http://schemas.microsoft.com/office/drawing/2014/main" id="{0860FE9D-243E-4742-9359-8320BE035CB8}"/>
               </a:ext>
             </a:extLst>
           </p:cNvPr>
@@ -5383,7 +5383,7 @@
     </p:spTree>
     <p:extLst>
       <p:ext uri="{BB962C8B-B14F-4D97-AF65-F5344CB8AC3E}">
-        <p14:creationId xmlns:p14="http://schemas.microsoft.com/office/powerpoint/2010/main" val="1971206544"/>
+        <p14:creationId xmlns:p14="http://schemas.microsoft.com/office/powerpoint/2010/main" val="850927956"/>
       </p:ext>
     </p:extLst>
   </p:cSld>
@@ -5584,7 +5584,7 @@
           <p:cNvPr id="23" name="">
             <a:extLst xmlns:a="http://schemas.openxmlformats.org/drawingml/2006/main">
               <a:ext uri="{FF2B5EF4-FFF2-40B4-BE49-F238E27FC236}">
-                <a16:creationId xmlns:a16="http://schemas.microsoft.com/office/drawing/2014/main" id="{66B98D70-B87A-43BF-9F2B-BFF1A8246004}"/>
+                <a16:creationId xmlns:a16="http://schemas.microsoft.com/office/drawing/2014/main" id="{3739EE72-93E6-4625-9E5C-3685E3ACDBEA}"/>
               </a:ext>
             </a:extLst>
           </p:cNvPr>
@@ -5616,7 +5616,7 @@
           <p:cNvPr id="2" name="">
             <a:extLst xmlns:a="http://schemas.openxmlformats.org/drawingml/2006/main">
               <a:ext uri="{FF2B5EF4-FFF2-40B4-BE49-F238E27FC236}">
-                <a16:creationId xmlns:a16="http://schemas.microsoft.com/office/drawing/2014/main" id="{AB2B3155-AAD6-4751-A65E-F700A46ACE5E}"/>
+                <a16:creationId xmlns:a16="http://schemas.microsoft.com/office/drawing/2014/main" id="{263A61B1-2038-4FC5-AC4F-48205E718DC3}"/>
               </a:ext>
             </a:extLst>
           </p:cNvPr>
@@ -5673,7 +5673,7 @@
           <p:cNvPr id="3" name="">
             <a:extLst xmlns:a="http://schemas.openxmlformats.org/drawingml/2006/main">
               <a:ext uri="{FF2B5EF4-FFF2-40B4-BE49-F238E27FC236}">
-                <a16:creationId xmlns:a16="http://schemas.microsoft.com/office/drawing/2014/main" id="{FE15CC43-9318-4B15-B0D1-05B68E51C1D1}"/>
+                <a16:creationId xmlns:a16="http://schemas.microsoft.com/office/drawing/2014/main" id="{60F6EE8F-9D7C-46EB-8D17-907775EE4B41}"/>
               </a:ext>
             </a:extLst>
           </p:cNvPr>
@@ -5705,7 +5705,7 @@
           <p:cNvPr id="4" name="">
             <a:extLst xmlns:a="http://schemas.openxmlformats.org/drawingml/2006/main">
               <a:ext uri="{FF2B5EF4-FFF2-40B4-BE49-F238E27FC236}">
-                <a16:creationId xmlns:a16="http://schemas.microsoft.com/office/drawing/2014/main" id="{08112153-4FA4-4D9C-B9D7-08C7AAB5456C}"/>
+                <a16:creationId xmlns:a16="http://schemas.microsoft.com/office/drawing/2014/main" id="{19D49E77-3D23-4850-A4BA-D8CFC2BC601E}"/>
               </a:ext>
             </a:extLst>
           </p:cNvPr>
@@ -5762,7 +5762,7 @@
           <p:cNvPr id="5" name="">
             <a:extLst xmlns:a="http://schemas.openxmlformats.org/drawingml/2006/main">
               <a:ext uri="{FF2B5EF4-FFF2-40B4-BE49-F238E27FC236}">
-                <a16:creationId xmlns:a16="http://schemas.microsoft.com/office/drawing/2014/main" id="{6AB1FBC4-3945-48B6-BFFD-E2CD425822E1}"/>
+                <a16:creationId xmlns:a16="http://schemas.microsoft.com/office/drawing/2014/main" id="{9A44CE9A-C525-4D22-8CCF-FED3817E4FF4}"/>
               </a:ext>
             </a:extLst>
           </p:cNvPr>
@@ -5819,7 +5819,7 @@
           <p:cNvPr id="6" name="">
             <a:extLst xmlns:a="http://schemas.openxmlformats.org/drawingml/2006/main">
               <a:ext uri="{FF2B5EF4-FFF2-40B4-BE49-F238E27FC236}">
-                <a16:creationId xmlns:a16="http://schemas.microsoft.com/office/drawing/2014/main" id="{DE1DFCE3-7FC9-420E-BDFD-1C6B44E46B14}"/>
+                <a16:creationId xmlns:a16="http://schemas.microsoft.com/office/drawing/2014/main" id="{92A9BBB3-EA65-45E0-B3D1-B1F48DD350B3}"/>
               </a:ext>
             </a:extLst>
           </p:cNvPr>
@@ -5876,7 +5876,7 @@
           <p:cNvPr id="7" name="">
             <a:extLst xmlns:a="http://schemas.openxmlformats.org/drawingml/2006/main">
               <a:ext uri="{FF2B5EF4-FFF2-40B4-BE49-F238E27FC236}">
-                <a16:creationId xmlns:a16="http://schemas.microsoft.com/office/drawing/2014/main" id="{1942D879-4920-4ADC-93F3-B4FECCCC60AC}"/>
+                <a16:creationId xmlns:a16="http://schemas.microsoft.com/office/drawing/2014/main" id="{3202692D-DF1F-41DC-A61D-CAA6A1CA3E9C}"/>
               </a:ext>
             </a:extLst>
           </p:cNvPr>
@@ -5908,7 +5908,7 @@
           <p:cNvPr id="8" name="">
             <a:extLst xmlns:a="http://schemas.openxmlformats.org/drawingml/2006/main">
               <a:ext uri="{FF2B5EF4-FFF2-40B4-BE49-F238E27FC236}">
-                <a16:creationId xmlns:a16="http://schemas.microsoft.com/office/drawing/2014/main" id="{AFD63B03-13E7-43EE-BB41-D8454AA0BE87}"/>
+                <a16:creationId xmlns:a16="http://schemas.microsoft.com/office/drawing/2014/main" id="{09D416A0-B3A0-41EF-B9DA-27892707CBD3}"/>
               </a:ext>
             </a:extLst>
           </p:cNvPr>
@@ -5965,7 +5965,7 @@
           <p:cNvPr id="9" name="">
             <a:extLst xmlns:a="http://schemas.openxmlformats.org/drawingml/2006/main">
               <a:ext uri="{FF2B5EF4-FFF2-40B4-BE49-F238E27FC236}">
-                <a16:creationId xmlns:a16="http://schemas.microsoft.com/office/drawing/2014/main" id="{71F16706-DBF8-40BD-8872-5AD2E1545CE4}"/>
+                <a16:creationId xmlns:a16="http://schemas.microsoft.com/office/drawing/2014/main" id="{DBE08B19-9650-4069-831F-17C906370263}"/>
               </a:ext>
             </a:extLst>
           </p:cNvPr>
@@ -6022,7 +6022,7 @@
           <p:cNvPr id="10" name="">
             <a:extLst xmlns:a="http://schemas.openxmlformats.org/drawingml/2006/main">
               <a:ext uri="{FF2B5EF4-FFF2-40B4-BE49-F238E27FC236}">
-                <a16:creationId xmlns:a16="http://schemas.microsoft.com/office/drawing/2014/main" id="{15013E59-1460-4D6E-BC9A-40FF1B0C7404}"/>
+                <a16:creationId xmlns:a16="http://schemas.microsoft.com/office/drawing/2014/main" id="{5797D311-B857-441F-8BD0-D3C90818D646}"/>
               </a:ext>
             </a:extLst>
           </p:cNvPr>
@@ -6056,7 +6056,7 @@
           <p:cNvPr id="11" name="">
             <a:extLst xmlns:a="http://schemas.openxmlformats.org/drawingml/2006/main">
               <a:ext uri="{FF2B5EF4-FFF2-40B4-BE49-F238E27FC236}">
-                <a16:creationId xmlns:a16="http://schemas.microsoft.com/office/drawing/2014/main" id="{F165E2BE-BA40-4DFB-BE26-F28F27F89517}"/>
+                <a16:creationId xmlns:a16="http://schemas.microsoft.com/office/drawing/2014/main" id="{44856BF2-D3FF-471B-BE61-ACF66F2DE806}"/>
               </a:ext>
             </a:extLst>
           </p:cNvPr>
@@ -6088,7 +6088,7 @@
           <p:cNvPr id="12" name="">
             <a:extLst xmlns:a="http://schemas.openxmlformats.org/drawingml/2006/main">
               <a:ext uri="{FF2B5EF4-FFF2-40B4-BE49-F238E27FC236}">
-                <a16:creationId xmlns:a16="http://schemas.microsoft.com/office/drawing/2014/main" id="{2C5D6F43-30C0-4C7C-8D46-9BE3270D8888}"/>
+                <a16:creationId xmlns:a16="http://schemas.microsoft.com/office/drawing/2014/main" id="{1732EB67-8198-4037-B944-52B984AE2C08}"/>
               </a:ext>
             </a:extLst>
           </p:cNvPr>
@@ -6145,7 +6145,7 @@
           <p:cNvPr id="13" name="">
             <a:extLst xmlns:a="http://schemas.openxmlformats.org/drawingml/2006/main">
               <a:ext uri="{FF2B5EF4-FFF2-40B4-BE49-F238E27FC236}">
-                <a16:creationId xmlns:a16="http://schemas.microsoft.com/office/drawing/2014/main" id="{51A43BC5-27F3-4771-A946-2AC1B69F2066}"/>
+                <a16:creationId xmlns:a16="http://schemas.microsoft.com/office/drawing/2014/main" id="{9A16819D-9EFD-4A4A-8189-B8C2A33B83ED}"/>
               </a:ext>
             </a:extLst>
           </p:cNvPr>
@@ -6202,7 +6202,7 @@
           <p:cNvPr id="14" name="">
             <a:extLst xmlns:a="http://schemas.openxmlformats.org/drawingml/2006/main">
               <a:ext uri="{FF2B5EF4-FFF2-40B4-BE49-F238E27FC236}">
-                <a16:creationId xmlns:a16="http://schemas.microsoft.com/office/drawing/2014/main" id="{0FFBA9B6-8D8A-4A52-84E1-E94DD3C5869D}"/>
+                <a16:creationId xmlns:a16="http://schemas.microsoft.com/office/drawing/2014/main" id="{D21C7BBA-D52C-4796-A311-6D18B69F2543}"/>
               </a:ext>
             </a:extLst>
           </p:cNvPr>
@@ -6236,7 +6236,7 @@
           <p:cNvPr id="15" name="">
             <a:extLst xmlns:a="http://schemas.openxmlformats.org/drawingml/2006/main">
               <a:ext uri="{FF2B5EF4-FFF2-40B4-BE49-F238E27FC236}">
-                <a16:creationId xmlns:a16="http://schemas.microsoft.com/office/drawing/2014/main" id="{1B7291FC-3DB7-45CB-ADAB-A89AA3BF7C5C}"/>
+                <a16:creationId xmlns:a16="http://schemas.microsoft.com/office/drawing/2014/main" id="{9F9F99C6-2F3E-4DE2-8091-0BFA6BF2F742}"/>
               </a:ext>
             </a:extLst>
           </p:cNvPr>
@@ -6268,7 +6268,7 @@
           <p:cNvPr id="16" name="">
             <a:extLst xmlns:a="http://schemas.openxmlformats.org/drawingml/2006/main">
               <a:ext uri="{FF2B5EF4-FFF2-40B4-BE49-F238E27FC236}">
-                <a16:creationId xmlns:a16="http://schemas.microsoft.com/office/drawing/2014/main" id="{D110AA5D-5396-48C2-8B6D-4FA41DF6104D}"/>
+                <a16:creationId xmlns:a16="http://schemas.microsoft.com/office/drawing/2014/main" id="{3E286DAB-64A7-4B1A-8210-DF864DCF2767}"/>
               </a:ext>
             </a:extLst>
           </p:cNvPr>
@@ -6325,7 +6325,7 @@
           <p:cNvPr id="17" name="">
             <a:extLst xmlns:a="http://schemas.openxmlformats.org/drawingml/2006/main">
               <a:ext uri="{FF2B5EF4-FFF2-40B4-BE49-F238E27FC236}">
-                <a16:creationId xmlns:a16="http://schemas.microsoft.com/office/drawing/2014/main" id="{434B2FDD-FBBF-4821-BE9A-34885B766D1E}"/>
+                <a16:creationId xmlns:a16="http://schemas.microsoft.com/office/drawing/2014/main" id="{63818F5C-8259-4A8A-8FE0-2FB096543B5C}"/>
               </a:ext>
             </a:extLst>
           </p:cNvPr>
@@ -6382,7 +6382,7 @@
           <p:cNvPr id="18" name="">
             <a:extLst xmlns:a="http://schemas.openxmlformats.org/drawingml/2006/main">
               <a:ext uri="{FF2B5EF4-FFF2-40B4-BE49-F238E27FC236}">
-                <a16:creationId xmlns:a16="http://schemas.microsoft.com/office/drawing/2014/main" id="{BC14BF02-F5CD-4FA8-9F36-54531F28F245}"/>
+                <a16:creationId xmlns:a16="http://schemas.microsoft.com/office/drawing/2014/main" id="{9D79D268-6ACB-4895-B3A3-DCD7A496A83F}"/>
               </a:ext>
             </a:extLst>
           </p:cNvPr>
@@ -6416,7 +6416,7 @@
           <p:cNvPr id="19" name="">
             <a:extLst xmlns:a="http://schemas.openxmlformats.org/drawingml/2006/main">
               <a:ext uri="{FF2B5EF4-FFF2-40B4-BE49-F238E27FC236}">
-                <a16:creationId xmlns:a16="http://schemas.microsoft.com/office/drawing/2014/main" id="{5EE666B6-716E-4125-A27F-C19B89A7EFF3}"/>
+                <a16:creationId xmlns:a16="http://schemas.microsoft.com/office/drawing/2014/main" id="{6E5A0A9C-E348-49BD-A06C-97A4AB9D1119}"/>
               </a:ext>
             </a:extLst>
           </p:cNvPr>
@@ -6448,7 +6448,7 @@
           <p:cNvPr id="20" name="">
             <a:extLst xmlns:a="http://schemas.openxmlformats.org/drawingml/2006/main">
               <a:ext uri="{FF2B5EF4-FFF2-40B4-BE49-F238E27FC236}">
-                <a16:creationId xmlns:a16="http://schemas.microsoft.com/office/drawing/2014/main" id="{6881B046-DB31-42D4-BB9E-70EAF106CB6D}"/>
+                <a16:creationId xmlns:a16="http://schemas.microsoft.com/office/drawing/2014/main" id="{2C39B635-A8CC-4BD1-A978-237240B6D7FD}"/>
               </a:ext>
             </a:extLst>
           </p:cNvPr>
@@ -6505,7 +6505,7 @@
           <p:cNvPr id="21" name="">
             <a:extLst xmlns:a="http://schemas.openxmlformats.org/drawingml/2006/main">
               <a:ext uri="{FF2B5EF4-FFF2-40B4-BE49-F238E27FC236}">
-                <a16:creationId xmlns:a16="http://schemas.microsoft.com/office/drawing/2014/main" id="{27E4756B-63A5-471C-9236-036B5252CF4D}"/>
+                <a16:creationId xmlns:a16="http://schemas.microsoft.com/office/drawing/2014/main" id="{4FA4992B-14F3-4029-B98D-C39C8364FF6F}"/>
               </a:ext>
             </a:extLst>
           </p:cNvPr>
@@ -6562,7 +6562,7 @@
           <p:cNvPr id="22" name="">
             <a:extLst xmlns:a="http://schemas.openxmlformats.org/drawingml/2006/main">
               <a:ext uri="{FF2B5EF4-FFF2-40B4-BE49-F238E27FC236}">
-                <a16:creationId xmlns:a16="http://schemas.microsoft.com/office/drawing/2014/main" id="{60DF7062-A7FD-4535-A672-C1FB5BBC5015}"/>
+                <a16:creationId xmlns:a16="http://schemas.microsoft.com/office/drawing/2014/main" id="{33F3406A-2689-49F8-A5F6-A83FDEE6D296}"/>
               </a:ext>
             </a:extLst>
           </p:cNvPr>
@@ -6617,7 +6617,7 @@
     </p:spTree>
     <p:extLst>
       <p:ext uri="{BB962C8B-B14F-4D97-AF65-F5344CB8AC3E}">
-        <p14:creationId xmlns:p14="http://schemas.microsoft.com/office/powerpoint/2010/main" val="1112321339"/>
+        <p14:creationId xmlns:p14="http://schemas.microsoft.com/office/powerpoint/2010/main" val="2017312364"/>
       </p:ext>
     </p:extLst>
   </p:cSld>
@@ -6818,7 +6818,7 @@
           <p:cNvPr id="16" name="">
             <a:extLst xmlns:a="http://schemas.openxmlformats.org/drawingml/2006/main">
               <a:ext uri="{FF2B5EF4-FFF2-40B4-BE49-F238E27FC236}">
-                <a16:creationId xmlns:a16="http://schemas.microsoft.com/office/drawing/2014/main" id="{B5023BEE-6C40-432E-9EBF-39E1E6180356}"/>
+                <a16:creationId xmlns:a16="http://schemas.microsoft.com/office/drawing/2014/main" id="{2EB176DE-B872-445F-B7B5-60625D7CA2BE}"/>
               </a:ext>
             </a:extLst>
           </p:cNvPr>
@@ -6850,7 +6850,7 @@
           <p:cNvPr id="2" name="">
             <a:extLst xmlns:a="http://schemas.openxmlformats.org/drawingml/2006/main">
               <a:ext uri="{FF2B5EF4-FFF2-40B4-BE49-F238E27FC236}">
-                <a16:creationId xmlns:a16="http://schemas.microsoft.com/office/drawing/2014/main" id="{35D779C1-2752-4C42-AD67-7DBC0B002EBA}"/>
+                <a16:creationId xmlns:a16="http://schemas.microsoft.com/office/drawing/2014/main" id="{4A17C052-FD8A-46E9-9DD4-F5BE408C521D}"/>
               </a:ext>
             </a:extLst>
           </p:cNvPr>
@@ -6907,7 +6907,7 @@
           <p:cNvPr id="3" name="">
             <a:extLst xmlns:a="http://schemas.openxmlformats.org/drawingml/2006/main">
               <a:ext uri="{FF2B5EF4-FFF2-40B4-BE49-F238E27FC236}">
-                <a16:creationId xmlns:a16="http://schemas.microsoft.com/office/drawing/2014/main" id="{D0209009-EF8E-49D8-BB0A-39F3992D5108}"/>
+                <a16:creationId xmlns:a16="http://schemas.microsoft.com/office/drawing/2014/main" id="{05963A97-4DA1-43EF-819E-3853E01B9444}"/>
               </a:ext>
             </a:extLst>
           </p:cNvPr>
@@ -6939,7 +6939,7 @@
           <p:cNvPr id="4" name="">
             <a:extLst xmlns:a="http://schemas.openxmlformats.org/drawingml/2006/main">
               <a:ext uri="{FF2B5EF4-FFF2-40B4-BE49-F238E27FC236}">
-                <a16:creationId xmlns:a16="http://schemas.microsoft.com/office/drawing/2014/main" id="{6DCFCC85-8EF2-4FE1-9602-2C36354C6148}"/>
+                <a16:creationId xmlns:a16="http://schemas.microsoft.com/office/drawing/2014/main" id="{22C7AF63-3E7D-45B3-B6FA-B9210AB9AD61}"/>
               </a:ext>
             </a:extLst>
           </p:cNvPr>
@@ -6996,7 +6996,7 @@
           <p:cNvPr id="5" name="">
             <a:extLst xmlns:a="http://schemas.openxmlformats.org/drawingml/2006/main">
               <a:ext uri="{FF2B5EF4-FFF2-40B4-BE49-F238E27FC236}">
-                <a16:creationId xmlns:a16="http://schemas.microsoft.com/office/drawing/2014/main" id="{014B6B94-DF3D-4A59-930B-6C3FAE59EBDD}"/>
+                <a16:creationId xmlns:a16="http://schemas.microsoft.com/office/drawing/2014/main" id="{6D852613-0612-403A-8335-7B0607C5F933}"/>
               </a:ext>
             </a:extLst>
           </p:cNvPr>
@@ -7053,7 +7053,7 @@
           <p:cNvPr id="6" name="">
             <a:extLst xmlns:a="http://schemas.openxmlformats.org/drawingml/2006/main">
               <a:ext uri="{FF2B5EF4-FFF2-40B4-BE49-F238E27FC236}">
-                <a16:creationId xmlns:a16="http://schemas.microsoft.com/office/drawing/2014/main" id="{AB3C4D4D-A557-4333-A3D9-6B0BABCBEA1E}"/>
+                <a16:creationId xmlns:a16="http://schemas.microsoft.com/office/drawing/2014/main" id="{B3905DBA-586B-4DBA-B59B-9EE680E523D8}"/>
               </a:ext>
             </a:extLst>
           </p:cNvPr>
@@ -7110,7 +7110,7 @@
           <p:cNvPr id="7" name="">
             <a:extLst xmlns:a="http://schemas.openxmlformats.org/drawingml/2006/main">
               <a:ext uri="{FF2B5EF4-FFF2-40B4-BE49-F238E27FC236}">
-                <a16:creationId xmlns:a16="http://schemas.microsoft.com/office/drawing/2014/main" id="{F5D0DEBD-694B-4256-B2A0-0CF8FD7B54FE}"/>
+                <a16:creationId xmlns:a16="http://schemas.microsoft.com/office/drawing/2014/main" id="{ACC67CBD-4E46-4D09-A7E7-9F25B643C715}"/>
               </a:ext>
             </a:extLst>
           </p:cNvPr>
@@ -7142,7 +7142,7 @@
           <p:cNvPr id="8" name="">
             <a:extLst xmlns:a="http://schemas.openxmlformats.org/drawingml/2006/main">
               <a:ext uri="{FF2B5EF4-FFF2-40B4-BE49-F238E27FC236}">
-                <a16:creationId xmlns:a16="http://schemas.microsoft.com/office/drawing/2014/main" id="{00F68537-8DC8-4540-A190-D3EEAADE40C2}"/>
+                <a16:creationId xmlns:a16="http://schemas.microsoft.com/office/drawing/2014/main" id="{C57231AF-6F25-4AD1-BBE6-9CA29F7AD8CB}"/>
               </a:ext>
             </a:extLst>
           </p:cNvPr>
@@ -7199,7 +7199,7 @@
           <p:cNvPr id="9" name="">
             <a:extLst xmlns:a="http://schemas.openxmlformats.org/drawingml/2006/main">
               <a:ext uri="{FF2B5EF4-FFF2-40B4-BE49-F238E27FC236}">
-                <a16:creationId xmlns:a16="http://schemas.microsoft.com/office/drawing/2014/main" id="{F6617F98-1EB3-4502-9EFA-FFBA60A768CE}"/>
+                <a16:creationId xmlns:a16="http://schemas.microsoft.com/office/drawing/2014/main" id="{821A2574-72A2-4DEA-8AD7-A45954181D86}"/>
               </a:ext>
             </a:extLst>
           </p:cNvPr>
@@ -7256,7 +7256,7 @@
           <p:cNvPr id="10" name="">
             <a:extLst xmlns:a="http://schemas.openxmlformats.org/drawingml/2006/main">
               <a:ext uri="{FF2B5EF4-FFF2-40B4-BE49-F238E27FC236}">
-                <a16:creationId xmlns:a16="http://schemas.microsoft.com/office/drawing/2014/main" id="{A72DC65C-99FC-4CFC-9470-F4E5FDC879FB}"/>
+                <a16:creationId xmlns:a16="http://schemas.microsoft.com/office/drawing/2014/main" id="{9E298CBD-6794-4A15-9009-C4CE734CB880}"/>
               </a:ext>
             </a:extLst>
           </p:cNvPr>
@@ -7313,7 +7313,7 @@
           <p:cNvPr id="11" name="">
             <a:extLst xmlns:a="http://schemas.openxmlformats.org/drawingml/2006/main">
               <a:ext uri="{FF2B5EF4-FFF2-40B4-BE49-F238E27FC236}">
-                <a16:creationId xmlns:a16="http://schemas.microsoft.com/office/drawing/2014/main" id="{2C63F7E1-2696-4126-B8E3-A5BC2FA73F86}"/>
+                <a16:creationId xmlns:a16="http://schemas.microsoft.com/office/drawing/2014/main" id="{6E8E5A3E-5C60-4DFE-B97B-1CEE6DADF8A9}"/>
               </a:ext>
             </a:extLst>
           </p:cNvPr>
@@ -7345,7 +7345,7 @@
           <p:cNvPr id="12" name="">
             <a:extLst xmlns:a="http://schemas.openxmlformats.org/drawingml/2006/main">
               <a:ext uri="{FF2B5EF4-FFF2-40B4-BE49-F238E27FC236}">
-                <a16:creationId xmlns:a16="http://schemas.microsoft.com/office/drawing/2014/main" id="{C4CF96A6-5A7A-4FA4-8059-EA47BE7E92C6}"/>
+                <a16:creationId xmlns:a16="http://schemas.microsoft.com/office/drawing/2014/main" id="{060BE6F7-DBCD-4FEB-A165-D73A3FA7E6A4}"/>
               </a:ext>
             </a:extLst>
           </p:cNvPr>
@@ -7402,7 +7402,7 @@
           <p:cNvPr id="13" name="">
             <a:extLst xmlns:a="http://schemas.openxmlformats.org/drawingml/2006/main">
               <a:ext uri="{FF2B5EF4-FFF2-40B4-BE49-F238E27FC236}">
-                <a16:creationId xmlns:a16="http://schemas.microsoft.com/office/drawing/2014/main" id="{56E3E82E-7F13-4A2E-8351-DB30218EFD7B}"/>
+                <a16:creationId xmlns:a16="http://schemas.microsoft.com/office/drawing/2014/main" id="{37776C59-171C-4AD0-8CCA-7D2528B9D9E9}"/>
               </a:ext>
             </a:extLst>
           </p:cNvPr>
@@ -7459,7 +7459,7 @@
           <p:cNvPr id="14" name="">
             <a:extLst xmlns:a="http://schemas.openxmlformats.org/drawingml/2006/main">
               <a:ext uri="{FF2B5EF4-FFF2-40B4-BE49-F238E27FC236}">
-                <a16:creationId xmlns:a16="http://schemas.microsoft.com/office/drawing/2014/main" id="{3600C1FE-B30E-4ABD-9050-BB19431682AA}"/>
+                <a16:creationId xmlns:a16="http://schemas.microsoft.com/office/drawing/2014/main" id="{9505B152-B293-4163-A53D-FCA8BD96D42A}"/>
               </a:ext>
             </a:extLst>
           </p:cNvPr>
@@ -7516,7 +7516,7 @@
           <p:cNvPr id="15" name="">
             <a:extLst xmlns:a="http://schemas.openxmlformats.org/drawingml/2006/main">
               <a:ext uri="{FF2B5EF4-FFF2-40B4-BE49-F238E27FC236}">
-                <a16:creationId xmlns:a16="http://schemas.microsoft.com/office/drawing/2014/main" id="{9B6E82BF-2931-4BC5-AE85-31B8A0E0E353}"/>
+                <a16:creationId xmlns:a16="http://schemas.microsoft.com/office/drawing/2014/main" id="{12D9E74A-E810-4D0B-89F9-1E140D44E866}"/>
               </a:ext>
             </a:extLst>
           </p:cNvPr>
@@ -7571,7 +7571,7 @@
     </p:spTree>
     <p:extLst>
       <p:ext uri="{BB962C8B-B14F-4D97-AF65-F5344CB8AC3E}">
-        <p14:creationId xmlns:p14="http://schemas.microsoft.com/office/powerpoint/2010/main" val="2132385719"/>
+        <p14:creationId xmlns:p14="http://schemas.microsoft.com/office/powerpoint/2010/main" val="604111817"/>
       </p:ext>
     </p:extLst>
   </p:cSld>
@@ -7772,7 +7772,7 @@
           <p:cNvPr id="23" name="">
             <a:extLst xmlns:a="http://schemas.openxmlformats.org/drawingml/2006/main">
               <a:ext uri="{FF2B5EF4-FFF2-40B4-BE49-F238E27FC236}">
-                <a16:creationId xmlns:a16="http://schemas.microsoft.com/office/drawing/2014/main" id="{F71DF3E8-D7D4-4223-AF21-4243CC970897}"/>
+                <a16:creationId xmlns:a16="http://schemas.microsoft.com/office/drawing/2014/main" id="{56A55127-7291-4F52-AA0C-073558B860AF}"/>
               </a:ext>
             </a:extLst>
           </p:cNvPr>
@@ -7804,7 +7804,7 @@
           <p:cNvPr id="2" name="">
             <a:extLst xmlns:a="http://schemas.openxmlformats.org/drawingml/2006/main">
               <a:ext uri="{FF2B5EF4-FFF2-40B4-BE49-F238E27FC236}">
-                <a16:creationId xmlns:a16="http://schemas.microsoft.com/office/drawing/2014/main" id="{AD336B18-ED3C-4020-AE8C-CD7AEAC33FE3}"/>
+                <a16:creationId xmlns:a16="http://schemas.microsoft.com/office/drawing/2014/main" id="{DB2C8981-4560-4BE3-B273-CC981328E0BD}"/>
               </a:ext>
             </a:extLst>
           </p:cNvPr>
@@ -7861,7 +7861,7 @@
           <p:cNvPr id="3" name="">
             <a:extLst xmlns:a="http://schemas.openxmlformats.org/drawingml/2006/main">
               <a:ext uri="{FF2B5EF4-FFF2-40B4-BE49-F238E27FC236}">
-                <a16:creationId xmlns:a16="http://schemas.microsoft.com/office/drawing/2014/main" id="{94F7222C-A8FC-4DA5-B870-10DCC8F72E50}"/>
+                <a16:creationId xmlns:a16="http://schemas.microsoft.com/office/drawing/2014/main" id="{B4D647E4-4E86-4274-B4BD-37FE8B8A703E}"/>
               </a:ext>
             </a:extLst>
           </p:cNvPr>
@@ -7893,7 +7893,7 @@
           <p:cNvPr id="4" name="">
             <a:extLst xmlns:a="http://schemas.openxmlformats.org/drawingml/2006/main">
               <a:ext uri="{FF2B5EF4-FFF2-40B4-BE49-F238E27FC236}">
-                <a16:creationId xmlns:a16="http://schemas.microsoft.com/office/drawing/2014/main" id="{6CAEB65F-856D-46B7-83CD-CF487463932C}"/>
+                <a16:creationId xmlns:a16="http://schemas.microsoft.com/office/drawing/2014/main" id="{405A3DAA-FB27-40AC-ADD0-E44CADDF4D3A}"/>
               </a:ext>
             </a:extLst>
           </p:cNvPr>
@@ -7950,7 +7950,7 @@
           <p:cNvPr id="5" name="">
             <a:extLst xmlns:a="http://schemas.openxmlformats.org/drawingml/2006/main">
               <a:ext uri="{FF2B5EF4-FFF2-40B4-BE49-F238E27FC236}">
-                <a16:creationId xmlns:a16="http://schemas.microsoft.com/office/drawing/2014/main" id="{7ECD20E5-93CF-475C-B41A-D5B4920732A4}"/>
+                <a16:creationId xmlns:a16="http://schemas.microsoft.com/office/drawing/2014/main" id="{6F3B43B7-C9D6-453E-A76E-89ED0905DF33}"/>
               </a:ext>
             </a:extLst>
           </p:cNvPr>
@@ -8007,7 +8007,7 @@
           <p:cNvPr id="6" name="">
             <a:extLst xmlns:a="http://schemas.openxmlformats.org/drawingml/2006/main">
               <a:ext uri="{FF2B5EF4-FFF2-40B4-BE49-F238E27FC236}">
-                <a16:creationId xmlns:a16="http://schemas.microsoft.com/office/drawing/2014/main" id="{620BC522-8AE3-4E2C-9D36-6F5C759E1531}"/>
+                <a16:creationId xmlns:a16="http://schemas.microsoft.com/office/drawing/2014/main" id="{A33855BC-103A-4FF3-B1F6-3DE2C776C0C1}"/>
               </a:ext>
             </a:extLst>
           </p:cNvPr>
@@ -8064,7 +8064,7 @@
           <p:cNvPr id="7" name="">
             <a:extLst xmlns:a="http://schemas.openxmlformats.org/drawingml/2006/main">
               <a:ext uri="{FF2B5EF4-FFF2-40B4-BE49-F238E27FC236}">
-                <a16:creationId xmlns:a16="http://schemas.microsoft.com/office/drawing/2014/main" id="{31F54AAF-D838-4B6D-8479-F61EF9C02C78}"/>
+                <a16:creationId xmlns:a16="http://schemas.microsoft.com/office/drawing/2014/main" id="{D5D11F34-98F0-4C6C-BEBC-BF840EF9A798}"/>
               </a:ext>
             </a:extLst>
           </p:cNvPr>
@@ -8096,7 +8096,7 @@
           <p:cNvPr id="8" name="">
             <a:extLst xmlns:a="http://schemas.openxmlformats.org/drawingml/2006/main">
               <a:ext uri="{FF2B5EF4-FFF2-40B4-BE49-F238E27FC236}">
-                <a16:creationId xmlns:a16="http://schemas.microsoft.com/office/drawing/2014/main" id="{7F5B409A-239E-43B6-AF92-B3E8622B8779}"/>
+                <a16:creationId xmlns:a16="http://schemas.microsoft.com/office/drawing/2014/main" id="{8E93A6FE-AFA7-4D7E-9DBF-36BF6D364FD0}"/>
               </a:ext>
             </a:extLst>
           </p:cNvPr>
@@ -8153,7 +8153,7 @@
           <p:cNvPr id="9" name="">
             <a:extLst xmlns:a="http://schemas.openxmlformats.org/drawingml/2006/main">
               <a:ext uri="{FF2B5EF4-FFF2-40B4-BE49-F238E27FC236}">
-                <a16:creationId xmlns:a16="http://schemas.microsoft.com/office/drawing/2014/main" id="{A8668D34-3CEB-4E87-8126-D2461375563A}"/>
+                <a16:creationId xmlns:a16="http://schemas.microsoft.com/office/drawing/2014/main" id="{5FDDE7A0-0038-44B4-990B-F00A9D0689CF}"/>
               </a:ext>
             </a:extLst>
           </p:cNvPr>
@@ -8210,19 +8210,19 @@
           <p:cNvPr id="10" name="">
             <a:extLst xmlns:a="http://schemas.openxmlformats.org/drawingml/2006/main">
               <a:ext uri="{FF2B5EF4-FFF2-40B4-BE49-F238E27FC236}">
-                <a16:creationId xmlns:a16="http://schemas.microsoft.com/office/drawing/2014/main" id="{F5980BEA-64AF-4445-8293-34C6238D5889}"/>
-              </a:ext>
-            </a:extLst>
-          </p:cNvPr>
-          <p:cNvSpPr>
-            <a:spLocks xmlns:a="http://schemas.openxmlformats.org/drawingml/2006/main" noGrp="1"/>
-          </p:cNvSpPr>
-          <p:nvPr/>
-        </p:nvSpPr>
-        <p:spPr>
-          <a:xfrm xmlns:a="http://schemas.openxmlformats.org/drawingml/2006/main">
-            <a:off x="914400" y="1257300"/>
-            <a:ext cx="10363200" cy="781050"/>
+                <a16:creationId xmlns:a16="http://schemas.microsoft.com/office/drawing/2014/main" id="{9CB17D5F-5273-4E31-B823-088E378EEE5B}"/>
+              </a:ext>
+            </a:extLst>
+          </p:cNvPr>
+          <p:cNvSpPr>
+            <a:spLocks xmlns:a="http://schemas.openxmlformats.org/drawingml/2006/main" noGrp="1"/>
+          </p:cNvSpPr>
+          <p:nvPr/>
+        </p:nvSpPr>
+        <p:spPr>
+          <a:xfrm xmlns:a="http://schemas.openxmlformats.org/drawingml/2006/main">
+            <a:off x="857250" y="1219200"/>
+            <a:ext cx="10477500" cy="742950"/>
           </a:xfrm>
           <a:prstGeom xmlns:a="http://schemas.openxmlformats.org/drawingml/2006/main" prst="rect">
             <a:avLst/>
@@ -8239,7 +8239,7 @@
           <a:lstStyle xmlns:a="http://schemas.openxmlformats.org/drawingml/2006/main"/>
           <a:p xmlns:a="http://schemas.openxmlformats.org/drawingml/2006/main">
             <a:pPr algn="ctr">
-              <a:defRPr sz="2175" b="1">
+              <a:defRPr sz="2100" b="1">
                 <a:solidFill>
                   <a:srgbClr val="17253A"/>
                 </a:solidFill>
@@ -8249,7 +8249,7 @@
               </a:defRPr>
             </a:pPr>
             <a:r>
-              <a:rPr sz="2175" b="1">
+              <a:rPr sz="2100" b="1">
                 <a:solidFill>
                   <a:srgbClr val="17253A"/>
                 </a:solidFill>
@@ -8267,28 +8267,30 @@
           <p:cNvPr id="11" name="">
             <a:extLst xmlns:a="http://schemas.openxmlformats.org/drawingml/2006/main">
               <a:ext uri="{FF2B5EF4-FFF2-40B4-BE49-F238E27FC236}">
-                <a16:creationId xmlns:a16="http://schemas.microsoft.com/office/drawing/2014/main" id="{EDD541CF-20C6-4D5F-9400-8FC3DBF17C2F}"/>
-              </a:ext>
-            </a:extLst>
-          </p:cNvPr>
-          <p:cNvSpPr>
-            <a:spLocks xmlns:a="http://schemas.openxmlformats.org/drawingml/2006/main" noGrp="1"/>
-          </p:cNvSpPr>
-          <p:nvPr/>
-        </p:nvSpPr>
-        <p:spPr>
-          <a:xfrm xmlns:a="http://schemas.openxmlformats.org/drawingml/2006/main">
-            <a:off x="1000125" y="2247900"/>
-            <a:ext cx="476250" cy="476250"/>
-          </a:xfrm>
-          <a:prstGeom xmlns:a="http://schemas.openxmlformats.org/drawingml/2006/main" prst="ellipse">
+                <a16:creationId xmlns:a16="http://schemas.microsoft.com/office/drawing/2014/main" id="{88593F81-D19F-4507-BCC9-D48710FB8DC8}"/>
+              </a:ext>
+            </a:extLst>
+          </p:cNvPr>
+          <p:cNvSpPr>
+            <a:spLocks xmlns:a="http://schemas.openxmlformats.org/drawingml/2006/main" noGrp="1"/>
+          </p:cNvSpPr>
+          <p:nvPr/>
+        </p:nvSpPr>
+        <p:spPr>
+          <a:xfrm xmlns:a="http://schemas.openxmlformats.org/drawingml/2006/main">
+            <a:off x="971550" y="2124075"/>
+            <a:ext cx="38100" cy="3524250"/>
+          </a:xfrm>
+          <a:prstGeom xmlns:a="http://schemas.openxmlformats.org/drawingml/2006/main" prst="rect">
             <a:avLst/>
           </a:prstGeom>
           <a:solidFill xmlns:a="http://schemas.openxmlformats.org/drawingml/2006/main">
-            <a:srgbClr val="18324A"/>
+            <a:srgbClr val="2C6E73"/>
           </a:solidFill>
           <a:ln xmlns:a="http://schemas.openxmlformats.org/drawingml/2006/main" w="0">
-            <a:noFill/>
+            <a:solidFill>
+              <a:srgbClr val="2C6E73"/>
+            </a:solidFill>
           </a:ln>
         </p:spPr>
       </p:sp>
@@ -8297,19 +8299,19 @@
           <p:cNvPr id="12" name="">
             <a:extLst xmlns:a="http://schemas.openxmlformats.org/drawingml/2006/main">
               <a:ext uri="{FF2B5EF4-FFF2-40B4-BE49-F238E27FC236}">
-                <a16:creationId xmlns:a16="http://schemas.microsoft.com/office/drawing/2014/main" id="{3CBA2BF2-8EC9-4A4E-8B05-35F1F0E0803E}"/>
-              </a:ext>
-            </a:extLst>
-          </p:cNvPr>
-          <p:cNvSpPr>
-            <a:spLocks xmlns:a="http://schemas.openxmlformats.org/drawingml/2006/main" noGrp="1"/>
-          </p:cNvSpPr>
-          <p:nvPr/>
-        </p:nvSpPr>
-        <p:spPr>
-          <a:xfrm xmlns:a="http://schemas.openxmlformats.org/drawingml/2006/main">
-            <a:off x="1000125" y="2276475"/>
-            <a:ext cx="476250" cy="419100"/>
+                <a16:creationId xmlns:a16="http://schemas.microsoft.com/office/drawing/2014/main" id="{E62EEA09-F8E0-4A47-A10D-C5588F79F212}"/>
+              </a:ext>
+            </a:extLst>
+          </p:cNvPr>
+          <p:cNvSpPr>
+            <a:spLocks xmlns:a="http://schemas.openxmlformats.org/drawingml/2006/main" noGrp="1"/>
+          </p:cNvSpPr>
+          <p:nvPr/>
+        </p:nvSpPr>
+        <p:spPr>
+          <a:xfrm xmlns:a="http://schemas.openxmlformats.org/drawingml/2006/main">
+            <a:off x="1162050" y="2200275"/>
+            <a:ext cx="400050" cy="400050"/>
           </a:xfrm>
           <a:prstGeom xmlns:a="http://schemas.openxmlformats.org/drawingml/2006/main" prst="rect">
             <a:avLst/>
@@ -8326,9 +8328,9 @@
           <a:lstStyle xmlns:a="http://schemas.openxmlformats.org/drawingml/2006/main"/>
           <a:p xmlns:a="http://schemas.openxmlformats.org/drawingml/2006/main">
             <a:pPr algn="ctr">
-              <a:defRPr sz="1350" b="1">
-                <a:solidFill>
-                  <a:srgbClr val="FFFFFF"/>
+              <a:defRPr sz="1125" b="1">
+                <a:solidFill>
+                  <a:srgbClr val="2C6E73"/>
                 </a:solidFill>
                 <a:latin typeface="Arial"/>
                 <a:ea typeface="Arial"/>
@@ -8336,9 +8338,9 @@
               </a:defRPr>
             </a:pPr>
             <a:r>
-              <a:rPr sz="1350" b="1">
-                <a:solidFill>
-                  <a:srgbClr val="FFFFFF"/>
+              <a:rPr sz="1125" b="1">
+                <a:solidFill>
+                  <a:srgbClr val="2C6E73"/>
                 </a:solidFill>
                 <a:latin typeface="Arial"/>
                 <a:ea typeface="Arial"/>
@@ -8354,19 +8356,19 @@
           <p:cNvPr id="13" name="">
             <a:extLst xmlns:a="http://schemas.openxmlformats.org/drawingml/2006/main">
               <a:ext uri="{FF2B5EF4-FFF2-40B4-BE49-F238E27FC236}">
-                <a16:creationId xmlns:a16="http://schemas.microsoft.com/office/drawing/2014/main" id="{12801695-21EC-4C07-8DFB-CC1A33352527}"/>
-              </a:ext>
-            </a:extLst>
-          </p:cNvPr>
-          <p:cNvSpPr>
-            <a:spLocks xmlns:a="http://schemas.openxmlformats.org/drawingml/2006/main" noGrp="1"/>
-          </p:cNvSpPr>
-          <p:nvPr/>
-        </p:nvSpPr>
-        <p:spPr>
-          <a:xfrm xmlns:a="http://schemas.openxmlformats.org/drawingml/2006/main">
-            <a:off x="1714500" y="2181225"/>
-            <a:ext cx="9429750" cy="609600"/>
+                <a16:creationId xmlns:a16="http://schemas.microsoft.com/office/drawing/2014/main" id="{C0CA2EC2-04B3-4737-B81E-EFA22C77CE18}"/>
+              </a:ext>
+            </a:extLst>
+          </p:cNvPr>
+          <p:cNvSpPr>
+            <a:spLocks xmlns:a="http://schemas.openxmlformats.org/drawingml/2006/main" noGrp="1"/>
+          </p:cNvSpPr>
+          <p:nvPr/>
+        </p:nvSpPr>
+        <p:spPr>
+          <a:xfrm xmlns:a="http://schemas.openxmlformats.org/drawingml/2006/main">
+            <a:off x="1714500" y="2114550"/>
+            <a:ext cx="9525000" cy="809625"/>
           </a:xfrm>
           <a:prstGeom xmlns:a="http://schemas.openxmlformats.org/drawingml/2006/main" prst="rect">
             <a:avLst/>
@@ -8383,7 +8385,7 @@
           <a:lstStyle xmlns:a="http://schemas.openxmlformats.org/drawingml/2006/main"/>
           <a:p xmlns:a="http://schemas.openxmlformats.org/drawingml/2006/main">
             <a:pPr algn="l">
-              <a:defRPr sz="1500" b="0">
+              <a:defRPr sz="1725" b="0">
                 <a:solidFill>
                   <a:srgbClr val="17253A"/>
                 </a:solidFill>
@@ -8393,7 +8395,7 @@
               </a:defRPr>
             </a:pPr>
             <a:r>
-              <a:rPr sz="1500" b="0">
+              <a:rPr sz="1725" b="0">
                 <a:solidFill>
                   <a:srgbClr val="17253A"/>
                 </a:solidFill>
@@ -8401,7 +8403,7 @@
                 <a:ea typeface="Arial"/>
                 <a:cs typeface="Arial"/>
               </a:rPr>
-              <a:t>Identify the structure: Choose a representation out of 100 or use division.</a:t>
+              <a:t>9/25</a:t>
             </a:r>
           </a:p>
         </p:txBody>
@@ -8411,28 +8413,30 @@
           <p:cNvPr id="14" name="">
             <a:extLst xmlns:a="http://schemas.openxmlformats.org/drawingml/2006/main">
               <a:ext uri="{FF2B5EF4-FFF2-40B4-BE49-F238E27FC236}">
-                <a16:creationId xmlns:a16="http://schemas.microsoft.com/office/drawing/2014/main" id="{8C6912E5-2B73-491F-9B43-70D50D9FBD1D}"/>
-              </a:ext>
-            </a:extLst>
-          </p:cNvPr>
-          <p:cNvSpPr>
-            <a:spLocks xmlns:a="http://schemas.openxmlformats.org/drawingml/2006/main" noGrp="1"/>
-          </p:cNvSpPr>
-          <p:nvPr/>
-        </p:nvSpPr>
-        <p:spPr>
-          <a:xfrm xmlns:a="http://schemas.openxmlformats.org/drawingml/2006/main">
-            <a:off x="1000125" y="2990850"/>
-            <a:ext cx="476250" cy="476250"/>
-          </a:xfrm>
-          <a:prstGeom xmlns:a="http://schemas.openxmlformats.org/drawingml/2006/main" prst="ellipse">
+                <a16:creationId xmlns:a16="http://schemas.microsoft.com/office/drawing/2014/main" id="{EE517A0F-BADB-4724-B07E-6C32D8FC929F}"/>
+              </a:ext>
+            </a:extLst>
+          </p:cNvPr>
+          <p:cNvSpPr>
+            <a:spLocks xmlns:a="http://schemas.openxmlformats.org/drawingml/2006/main" noGrp="1"/>
+          </p:cNvSpPr>
+          <p:nvPr/>
+        </p:nvSpPr>
+        <p:spPr>
+          <a:xfrm xmlns:a="http://schemas.openxmlformats.org/drawingml/2006/main">
+            <a:off x="1714500" y="2943225"/>
+            <a:ext cx="9334500" cy="9525"/>
+          </a:xfrm>
+          <a:prstGeom xmlns:a="http://schemas.openxmlformats.org/drawingml/2006/main" prst="rect">
             <a:avLst/>
           </a:prstGeom>
           <a:solidFill xmlns:a="http://schemas.openxmlformats.org/drawingml/2006/main">
-            <a:srgbClr val="2C6E73"/>
+            <a:srgbClr val="D9E0E6"/>
           </a:solidFill>
           <a:ln xmlns:a="http://schemas.openxmlformats.org/drawingml/2006/main" w="0">
-            <a:noFill/>
+            <a:solidFill>
+              <a:srgbClr val="D9E0E6"/>
+            </a:solidFill>
           </a:ln>
         </p:spPr>
       </p:sp>
@@ -8441,19 +8445,19 @@
           <p:cNvPr id="15" name="">
             <a:extLst xmlns:a="http://schemas.openxmlformats.org/drawingml/2006/main">
               <a:ext uri="{FF2B5EF4-FFF2-40B4-BE49-F238E27FC236}">
-                <a16:creationId xmlns:a16="http://schemas.microsoft.com/office/drawing/2014/main" id="{F0B7E499-D771-4982-85D2-DCDC35C8C29D}"/>
-              </a:ext>
-            </a:extLst>
-          </p:cNvPr>
-          <p:cNvSpPr>
-            <a:spLocks xmlns:a="http://schemas.openxmlformats.org/drawingml/2006/main" noGrp="1"/>
-          </p:cNvSpPr>
-          <p:nvPr/>
-        </p:nvSpPr>
-        <p:spPr>
-          <a:xfrm xmlns:a="http://schemas.openxmlformats.org/drawingml/2006/main">
-            <a:off x="1000125" y="3019425"/>
-            <a:ext cx="476250" cy="419100"/>
+                <a16:creationId xmlns:a16="http://schemas.microsoft.com/office/drawing/2014/main" id="{27214156-0142-420C-833C-09781FB0F6D1}"/>
+              </a:ext>
+            </a:extLst>
+          </p:cNvPr>
+          <p:cNvSpPr>
+            <a:spLocks xmlns:a="http://schemas.openxmlformats.org/drawingml/2006/main" noGrp="1"/>
+          </p:cNvSpPr>
+          <p:nvPr/>
+        </p:nvSpPr>
+        <p:spPr>
+          <a:xfrm xmlns:a="http://schemas.openxmlformats.org/drawingml/2006/main">
+            <a:off x="1162050" y="3076575"/>
+            <a:ext cx="400050" cy="400050"/>
           </a:xfrm>
           <a:prstGeom xmlns:a="http://schemas.openxmlformats.org/drawingml/2006/main" prst="rect">
             <a:avLst/>
@@ -8470,9 +8474,9 @@
           <a:lstStyle xmlns:a="http://schemas.openxmlformats.org/drawingml/2006/main"/>
           <a:p xmlns:a="http://schemas.openxmlformats.org/drawingml/2006/main">
             <a:pPr algn="ctr">
-              <a:defRPr sz="1350" b="1">
-                <a:solidFill>
-                  <a:srgbClr val="FFFFFF"/>
+              <a:defRPr sz="1125" b="1">
+                <a:solidFill>
+                  <a:srgbClr val="2C6E73"/>
                 </a:solidFill>
                 <a:latin typeface="Arial"/>
                 <a:ea typeface="Arial"/>
@@ -8480,9 +8484,9 @@
               </a:defRPr>
             </a:pPr>
             <a:r>
-              <a:rPr sz="1350" b="1">
-                <a:solidFill>
-                  <a:srgbClr val="FFFFFF"/>
+              <a:rPr sz="1125" b="1">
+                <a:solidFill>
+                  <a:srgbClr val="2C6E73"/>
                 </a:solidFill>
                 <a:latin typeface="Arial"/>
                 <a:ea typeface="Arial"/>
@@ -8498,19 +8502,19 @@
           <p:cNvPr id="16" name="">
             <a:extLst xmlns:a="http://schemas.openxmlformats.org/drawingml/2006/main">
               <a:ext uri="{FF2B5EF4-FFF2-40B4-BE49-F238E27FC236}">
-                <a16:creationId xmlns:a16="http://schemas.microsoft.com/office/drawing/2014/main" id="{63FEF795-844D-4B6D-8D2A-9CCAA2AF64A6}"/>
-              </a:ext>
-            </a:extLst>
-          </p:cNvPr>
-          <p:cNvSpPr>
-            <a:spLocks xmlns:a="http://schemas.openxmlformats.org/drawingml/2006/main" noGrp="1"/>
-          </p:cNvSpPr>
-          <p:nvPr/>
-        </p:nvSpPr>
-        <p:spPr>
-          <a:xfrm xmlns:a="http://schemas.openxmlformats.org/drawingml/2006/main">
-            <a:off x="1714500" y="2924175"/>
-            <a:ext cx="9429750" cy="609600"/>
+                <a16:creationId xmlns:a16="http://schemas.microsoft.com/office/drawing/2014/main" id="{1787F34D-BE30-419F-8A28-3837CAB64EB1}"/>
+              </a:ext>
+            </a:extLst>
+          </p:cNvPr>
+          <p:cNvSpPr>
+            <a:spLocks xmlns:a="http://schemas.openxmlformats.org/drawingml/2006/main" noGrp="1"/>
+          </p:cNvSpPr>
+          <p:nvPr/>
+        </p:nvSpPr>
+        <p:spPr>
+          <a:xfrm xmlns:a="http://schemas.openxmlformats.org/drawingml/2006/main">
+            <a:off x="1714500" y="2990850"/>
+            <a:ext cx="9525000" cy="809625"/>
           </a:xfrm>
           <a:prstGeom xmlns:a="http://schemas.openxmlformats.org/drawingml/2006/main" prst="rect">
             <a:avLst/>
@@ -8527,7 +8531,7 @@
           <a:lstStyle xmlns:a="http://schemas.openxmlformats.org/drawingml/2006/main"/>
           <a:p xmlns:a="http://schemas.openxmlformats.org/drawingml/2006/main">
             <a:pPr algn="l">
-              <a:defRPr sz="1500" b="0">
+              <a:defRPr sz="1725" b="0">
                 <a:solidFill>
                   <a:srgbClr val="17253A"/>
                 </a:solidFill>
@@ -8537,7 +8541,7 @@
               </a:defRPr>
             </a:pPr>
             <a:r>
-              <a:rPr sz="1500" b="0">
+              <a:rPr sz="1725" b="0">
                 <a:solidFill>
                   <a:srgbClr val="17253A"/>
                 </a:solidFill>
@@ -8545,7 +8549,7 @@
                 <a:ea typeface="Arial"/>
                 <a:cs typeface="Arial"/>
               </a:rPr>
-              <a:t>Set up the method: Convert carefully while preserving the value.</a:t>
+              <a:t>Make hundredths: 25 × 4 = 100</a:t>
             </a:r>
           </a:p>
         </p:txBody>
@@ -8555,28 +8559,30 @@
           <p:cNvPr id="17" name="">
             <a:extLst xmlns:a="http://schemas.openxmlformats.org/drawingml/2006/main">
               <a:ext uri="{FF2B5EF4-FFF2-40B4-BE49-F238E27FC236}">
-                <a16:creationId xmlns:a16="http://schemas.microsoft.com/office/drawing/2014/main" id="{F029FE13-3158-41A3-8F61-634936FA64CF}"/>
-              </a:ext>
-            </a:extLst>
-          </p:cNvPr>
-          <p:cNvSpPr>
-            <a:spLocks xmlns:a="http://schemas.openxmlformats.org/drawingml/2006/main" noGrp="1"/>
-          </p:cNvSpPr>
-          <p:nvPr/>
-        </p:nvSpPr>
-        <p:spPr>
-          <a:xfrm xmlns:a="http://schemas.openxmlformats.org/drawingml/2006/main">
-            <a:off x="1000125" y="3733800"/>
-            <a:ext cx="476250" cy="476250"/>
-          </a:xfrm>
-          <a:prstGeom xmlns:a="http://schemas.openxmlformats.org/drawingml/2006/main" prst="ellipse">
+                <a16:creationId xmlns:a16="http://schemas.microsoft.com/office/drawing/2014/main" id="{B7F57040-5A7A-4B36-BA3B-6DFC13625E5D}"/>
+              </a:ext>
+            </a:extLst>
+          </p:cNvPr>
+          <p:cNvSpPr>
+            <a:spLocks xmlns:a="http://schemas.openxmlformats.org/drawingml/2006/main" noGrp="1"/>
+          </p:cNvSpPr>
+          <p:nvPr/>
+        </p:nvSpPr>
+        <p:spPr>
+          <a:xfrm xmlns:a="http://schemas.openxmlformats.org/drawingml/2006/main">
+            <a:off x="1714500" y="3819525"/>
+            <a:ext cx="9334500" cy="9525"/>
+          </a:xfrm>
+          <a:prstGeom xmlns:a="http://schemas.openxmlformats.org/drawingml/2006/main" prst="rect">
             <a:avLst/>
           </a:prstGeom>
           <a:solidFill xmlns:a="http://schemas.openxmlformats.org/drawingml/2006/main">
-            <a:srgbClr val="2C6E73"/>
+            <a:srgbClr val="D9E0E6"/>
           </a:solidFill>
           <a:ln xmlns:a="http://schemas.openxmlformats.org/drawingml/2006/main" w="0">
-            <a:noFill/>
+            <a:solidFill>
+              <a:srgbClr val="D9E0E6"/>
+            </a:solidFill>
           </a:ln>
         </p:spPr>
       </p:sp>
@@ -8585,19 +8591,19 @@
           <p:cNvPr id="18" name="">
             <a:extLst xmlns:a="http://schemas.openxmlformats.org/drawingml/2006/main">
               <a:ext uri="{FF2B5EF4-FFF2-40B4-BE49-F238E27FC236}">
-                <a16:creationId xmlns:a16="http://schemas.microsoft.com/office/drawing/2014/main" id="{075A7C68-F062-4EFA-884D-4A27723C42AD}"/>
-              </a:ext>
-            </a:extLst>
-          </p:cNvPr>
-          <p:cNvSpPr>
-            <a:spLocks xmlns:a="http://schemas.openxmlformats.org/drawingml/2006/main" noGrp="1"/>
-          </p:cNvSpPr>
-          <p:nvPr/>
-        </p:nvSpPr>
-        <p:spPr>
-          <a:xfrm xmlns:a="http://schemas.openxmlformats.org/drawingml/2006/main">
-            <a:off x="1000125" y="3762375"/>
-            <a:ext cx="476250" cy="419100"/>
+                <a16:creationId xmlns:a16="http://schemas.microsoft.com/office/drawing/2014/main" id="{DFFEC604-5E03-4B5A-B88F-E13E9489E952}"/>
+              </a:ext>
+            </a:extLst>
+          </p:cNvPr>
+          <p:cNvSpPr>
+            <a:spLocks xmlns:a="http://schemas.openxmlformats.org/drawingml/2006/main" noGrp="1"/>
+          </p:cNvSpPr>
+          <p:nvPr/>
+        </p:nvSpPr>
+        <p:spPr>
+          <a:xfrm xmlns:a="http://schemas.openxmlformats.org/drawingml/2006/main">
+            <a:off x="1162050" y="3952875"/>
+            <a:ext cx="400050" cy="400050"/>
           </a:xfrm>
           <a:prstGeom xmlns:a="http://schemas.openxmlformats.org/drawingml/2006/main" prst="rect">
             <a:avLst/>
@@ -8614,9 +8620,9 @@
           <a:lstStyle xmlns:a="http://schemas.openxmlformats.org/drawingml/2006/main"/>
           <a:p xmlns:a="http://schemas.openxmlformats.org/drawingml/2006/main">
             <a:pPr algn="ctr">
-              <a:defRPr sz="1350" b="1">
-                <a:solidFill>
-                  <a:srgbClr val="FFFFFF"/>
+              <a:defRPr sz="1125" b="1">
+                <a:solidFill>
+                  <a:srgbClr val="2C6E73"/>
                 </a:solidFill>
                 <a:latin typeface="Arial"/>
                 <a:ea typeface="Arial"/>
@@ -8624,9 +8630,9 @@
               </a:defRPr>
             </a:pPr>
             <a:r>
-              <a:rPr sz="1350" b="1">
-                <a:solidFill>
-                  <a:srgbClr val="FFFFFF"/>
+              <a:rPr sz="1125" b="1">
+                <a:solidFill>
+                  <a:srgbClr val="2C6E73"/>
                 </a:solidFill>
                 <a:latin typeface="Arial"/>
                 <a:ea typeface="Arial"/>
@@ -8642,19 +8648,19 @@
           <p:cNvPr id="19" name="">
             <a:extLst xmlns:a="http://schemas.openxmlformats.org/drawingml/2006/main">
               <a:ext uri="{FF2B5EF4-FFF2-40B4-BE49-F238E27FC236}">
-                <a16:creationId xmlns:a16="http://schemas.microsoft.com/office/drawing/2014/main" id="{06AD50FA-BEF5-4E83-81ED-B1BEC50DDA08}"/>
-              </a:ext>
-            </a:extLst>
-          </p:cNvPr>
-          <p:cNvSpPr>
-            <a:spLocks xmlns:a="http://schemas.openxmlformats.org/drawingml/2006/main" noGrp="1"/>
-          </p:cNvSpPr>
-          <p:nvPr/>
-        </p:nvSpPr>
-        <p:spPr>
-          <a:xfrm xmlns:a="http://schemas.openxmlformats.org/drawingml/2006/main">
-            <a:off x="1714500" y="3667125"/>
-            <a:ext cx="9429750" cy="609600"/>
+                <a16:creationId xmlns:a16="http://schemas.microsoft.com/office/drawing/2014/main" id="{B4869C6A-77DE-4BD3-877D-00E1F96D3168}"/>
+              </a:ext>
+            </a:extLst>
+          </p:cNvPr>
+          <p:cNvSpPr>
+            <a:spLocks xmlns:a="http://schemas.openxmlformats.org/drawingml/2006/main" noGrp="1"/>
+          </p:cNvSpPr>
+          <p:nvPr/>
+        </p:nvSpPr>
+        <p:spPr>
+          <a:xfrm xmlns:a="http://schemas.openxmlformats.org/drawingml/2006/main">
+            <a:off x="1714500" y="3867150"/>
+            <a:ext cx="9525000" cy="809625"/>
           </a:xfrm>
           <a:prstGeom xmlns:a="http://schemas.openxmlformats.org/drawingml/2006/main" prst="rect">
             <a:avLst/>
@@ -8671,7 +8677,7 @@
           <a:lstStyle xmlns:a="http://schemas.openxmlformats.org/drawingml/2006/main"/>
           <a:p xmlns:a="http://schemas.openxmlformats.org/drawingml/2006/main">
             <a:pPr algn="l">
-              <a:defRPr sz="1500" b="0">
+              <a:defRPr sz="1725" b="0">
                 <a:solidFill>
                   <a:srgbClr val="17253A"/>
                 </a:solidFill>
@@ -8681,7 +8687,7 @@
               </a:defRPr>
             </a:pPr>
             <a:r>
-              <a:rPr sz="1500" b="0">
+              <a:rPr sz="1725" b="0">
                 <a:solidFill>
                   <a:srgbClr val="17253A"/>
                 </a:solidFill>
@@ -8689,7 +8695,7 @@
                 <a:ea typeface="Arial"/>
                 <a:cs typeface="Arial"/>
               </a:rPr>
-              <a:t>Complete the calculation: 0.36 and 36%.</a:t>
+              <a:t>9 × 4 = 36 → 36/100</a:t>
             </a:r>
           </a:p>
         </p:txBody>
@@ -8699,28 +8705,30 @@
           <p:cNvPr id="20" name="">
             <a:extLst xmlns:a="http://schemas.openxmlformats.org/drawingml/2006/main">
               <a:ext uri="{FF2B5EF4-FFF2-40B4-BE49-F238E27FC236}">
-                <a16:creationId xmlns:a16="http://schemas.microsoft.com/office/drawing/2014/main" id="{96ADBC9D-6AD0-4193-AB4B-5E61FA6B42ED}"/>
-              </a:ext>
-            </a:extLst>
-          </p:cNvPr>
-          <p:cNvSpPr>
-            <a:spLocks xmlns:a="http://schemas.openxmlformats.org/drawingml/2006/main" noGrp="1"/>
-          </p:cNvSpPr>
-          <p:nvPr/>
-        </p:nvSpPr>
-        <p:spPr>
-          <a:xfrm xmlns:a="http://schemas.openxmlformats.org/drawingml/2006/main">
-            <a:off x="1000125" y="4476750"/>
-            <a:ext cx="476250" cy="476250"/>
-          </a:xfrm>
-          <a:prstGeom xmlns:a="http://schemas.openxmlformats.org/drawingml/2006/main" prst="ellipse">
+                <a16:creationId xmlns:a16="http://schemas.microsoft.com/office/drawing/2014/main" id="{4ED451F9-A916-4091-AD96-5D435E03C353}"/>
+              </a:ext>
+            </a:extLst>
+          </p:cNvPr>
+          <p:cNvSpPr>
+            <a:spLocks xmlns:a="http://schemas.openxmlformats.org/drawingml/2006/main" noGrp="1"/>
+          </p:cNvSpPr>
+          <p:nvPr/>
+        </p:nvSpPr>
+        <p:spPr>
+          <a:xfrm xmlns:a="http://schemas.openxmlformats.org/drawingml/2006/main">
+            <a:off x="1714500" y="4695825"/>
+            <a:ext cx="9334500" cy="9525"/>
+          </a:xfrm>
+          <a:prstGeom xmlns:a="http://schemas.openxmlformats.org/drawingml/2006/main" prst="rect">
             <a:avLst/>
           </a:prstGeom>
           <a:solidFill xmlns:a="http://schemas.openxmlformats.org/drawingml/2006/main">
-            <a:srgbClr val="2C6E73"/>
+            <a:srgbClr val="D9E0E6"/>
           </a:solidFill>
           <a:ln xmlns:a="http://schemas.openxmlformats.org/drawingml/2006/main" w="0">
-            <a:noFill/>
+            <a:solidFill>
+              <a:srgbClr val="D9E0E6"/>
+            </a:solidFill>
           </a:ln>
         </p:spPr>
       </p:sp>
@@ -8729,19 +8737,19 @@
           <p:cNvPr id="21" name="">
             <a:extLst xmlns:a="http://schemas.openxmlformats.org/drawingml/2006/main">
               <a:ext uri="{FF2B5EF4-FFF2-40B4-BE49-F238E27FC236}">
-                <a16:creationId xmlns:a16="http://schemas.microsoft.com/office/drawing/2014/main" id="{914CE242-2F67-4EBD-9009-E2AD1FBAAD01}"/>
-              </a:ext>
-            </a:extLst>
-          </p:cNvPr>
-          <p:cNvSpPr>
-            <a:spLocks xmlns:a="http://schemas.openxmlformats.org/drawingml/2006/main" noGrp="1"/>
-          </p:cNvSpPr>
-          <p:nvPr/>
-        </p:nvSpPr>
-        <p:spPr>
-          <a:xfrm xmlns:a="http://schemas.openxmlformats.org/drawingml/2006/main">
-            <a:off x="1000125" y="4505325"/>
-            <a:ext cx="476250" cy="419100"/>
+                <a16:creationId xmlns:a16="http://schemas.microsoft.com/office/drawing/2014/main" id="{51551939-B14B-4606-AD32-98D071DD65B1}"/>
+              </a:ext>
+            </a:extLst>
+          </p:cNvPr>
+          <p:cNvSpPr>
+            <a:spLocks xmlns:a="http://schemas.openxmlformats.org/drawingml/2006/main" noGrp="1"/>
+          </p:cNvSpPr>
+          <p:nvPr/>
+        </p:nvSpPr>
+        <p:spPr>
+          <a:xfrm xmlns:a="http://schemas.openxmlformats.org/drawingml/2006/main">
+            <a:off x="1162050" y="4829175"/>
+            <a:ext cx="400050" cy="400050"/>
           </a:xfrm>
           <a:prstGeom xmlns:a="http://schemas.openxmlformats.org/drawingml/2006/main" prst="rect">
             <a:avLst/>
@@ -8758,9 +8766,9 @@
           <a:lstStyle xmlns:a="http://schemas.openxmlformats.org/drawingml/2006/main"/>
           <a:p xmlns:a="http://schemas.openxmlformats.org/drawingml/2006/main">
             <a:pPr algn="ctr">
-              <a:defRPr sz="1350" b="1">
-                <a:solidFill>
-                  <a:srgbClr val="FFFFFF"/>
+              <a:defRPr sz="1125" b="1">
+                <a:solidFill>
+                  <a:srgbClr val="2F785D"/>
                 </a:solidFill>
                 <a:latin typeface="Arial"/>
                 <a:ea typeface="Arial"/>
@@ -8768,9 +8776,9 @@
               </a:defRPr>
             </a:pPr>
             <a:r>
-              <a:rPr sz="1350" b="1">
-                <a:solidFill>
-                  <a:srgbClr val="FFFFFF"/>
+              <a:rPr sz="1125" b="1">
+                <a:solidFill>
+                  <a:srgbClr val="2F785D"/>
                 </a:solidFill>
                 <a:latin typeface="Arial"/>
                 <a:ea typeface="Arial"/>
@@ -8786,19 +8794,19 @@
           <p:cNvPr id="22" name="">
             <a:extLst xmlns:a="http://schemas.openxmlformats.org/drawingml/2006/main">
               <a:ext uri="{FF2B5EF4-FFF2-40B4-BE49-F238E27FC236}">
-                <a16:creationId xmlns:a16="http://schemas.microsoft.com/office/drawing/2014/main" id="{24960498-D8A3-4A76-9F11-F1EE3054A6DB}"/>
-              </a:ext>
-            </a:extLst>
-          </p:cNvPr>
-          <p:cNvSpPr>
-            <a:spLocks xmlns:a="http://schemas.openxmlformats.org/drawingml/2006/main" noGrp="1"/>
-          </p:cNvSpPr>
-          <p:nvPr/>
-        </p:nvSpPr>
-        <p:spPr>
-          <a:xfrm xmlns:a="http://schemas.openxmlformats.org/drawingml/2006/main">
-            <a:off x="1714500" y="4410075"/>
-            <a:ext cx="9429750" cy="609600"/>
+                <a16:creationId xmlns:a16="http://schemas.microsoft.com/office/drawing/2014/main" id="{650DCFFD-34E0-40EE-B9AB-6E45F4A3F216}"/>
+              </a:ext>
+            </a:extLst>
+          </p:cNvPr>
+          <p:cNvSpPr>
+            <a:spLocks xmlns:a="http://schemas.openxmlformats.org/drawingml/2006/main" noGrp="1"/>
+          </p:cNvSpPr>
+          <p:nvPr/>
+        </p:nvSpPr>
+        <p:spPr>
+          <a:xfrm xmlns:a="http://schemas.openxmlformats.org/drawingml/2006/main">
+            <a:off x="1714500" y="4743450"/>
+            <a:ext cx="9525000" cy="809625"/>
           </a:xfrm>
           <a:prstGeom xmlns:a="http://schemas.openxmlformats.org/drawingml/2006/main" prst="rect">
             <a:avLst/>
@@ -8815,7 +8823,7 @@
           <a:lstStyle xmlns:a="http://schemas.openxmlformats.org/drawingml/2006/main"/>
           <a:p xmlns:a="http://schemas.openxmlformats.org/drawingml/2006/main">
             <a:pPr algn="l">
-              <a:defRPr sz="1500" b="1">
+              <a:defRPr sz="1725" b="1">
                 <a:solidFill>
                   <a:srgbClr val="2F785D"/>
                 </a:solidFill>
@@ -8825,7 +8833,7 @@
               </a:defRPr>
             </a:pPr>
             <a:r>
-              <a:rPr sz="1500" b="1">
+              <a:rPr sz="1725" b="1">
                 <a:solidFill>
                   <a:srgbClr val="2F785D"/>
                 </a:solidFill>
@@ -8833,7 +8841,7 @@
                 <a:ea typeface="Arial"/>
                 <a:cs typeface="Arial"/>
               </a:rPr>
-              <a:t>Check the result: Check the three forms against a benchmark such as one half.</a:t>
+              <a:t>36/100 = 0.36 = 36%</a:t>
             </a:r>
           </a:p>
         </p:txBody>
@@ -8841,7 +8849,7 @@
     </p:spTree>
     <p:extLst>
       <p:ext uri="{BB962C8B-B14F-4D97-AF65-F5344CB8AC3E}">
-        <p14:creationId xmlns:p14="http://schemas.microsoft.com/office/powerpoint/2010/main" val="1878250404"/>
+        <p14:creationId xmlns:p14="http://schemas.microsoft.com/office/powerpoint/2010/main" val="1076935223"/>
       </p:ext>
     </p:extLst>
   </p:cSld>
@@ -9134,7 +9142,7 @@
           <p:cNvPr id="15" name="">
             <a:extLst xmlns:a="http://schemas.openxmlformats.org/drawingml/2006/main">
               <a:ext uri="{FF2B5EF4-FFF2-40B4-BE49-F238E27FC236}">
-                <a16:creationId xmlns:a16="http://schemas.microsoft.com/office/drawing/2014/main" id="{59F5FE20-EA57-4D5C-BB39-721ED2C26C7C}"/>
+                <a16:creationId xmlns:a16="http://schemas.microsoft.com/office/drawing/2014/main" id="{67D29184-EF0F-46A1-BECB-EE0606D7CF08}"/>
               </a:ext>
             </a:extLst>
           </p:cNvPr>
@@ -9166,7 +9174,7 @@
           <p:cNvPr id="2" name="">
             <a:extLst xmlns:a="http://schemas.openxmlformats.org/drawingml/2006/main">
               <a:ext uri="{FF2B5EF4-FFF2-40B4-BE49-F238E27FC236}">
-                <a16:creationId xmlns:a16="http://schemas.microsoft.com/office/drawing/2014/main" id="{5D99EE93-7513-42C6-B219-AE256CEF3153}"/>
+                <a16:creationId xmlns:a16="http://schemas.microsoft.com/office/drawing/2014/main" id="{074CC15C-D076-46E5-85B3-CAA587D0C6F0}"/>
               </a:ext>
             </a:extLst>
           </p:cNvPr>
@@ -9223,7 +9231,7 @@
           <p:cNvPr id="3" name="">
             <a:extLst xmlns:a="http://schemas.openxmlformats.org/drawingml/2006/main">
               <a:ext uri="{FF2B5EF4-FFF2-40B4-BE49-F238E27FC236}">
-                <a16:creationId xmlns:a16="http://schemas.microsoft.com/office/drawing/2014/main" id="{4E61A987-A2A2-4D46-A863-6118C11A14FE}"/>
+                <a16:creationId xmlns:a16="http://schemas.microsoft.com/office/drawing/2014/main" id="{E91F87B3-F2B9-4A46-A7E4-AF614F385B98}"/>
               </a:ext>
             </a:extLst>
           </p:cNvPr>
@@ -9255,7 +9263,7 @@
           <p:cNvPr id="4" name="">
             <a:extLst xmlns:a="http://schemas.openxmlformats.org/drawingml/2006/main">
               <a:ext uri="{FF2B5EF4-FFF2-40B4-BE49-F238E27FC236}">
-                <a16:creationId xmlns:a16="http://schemas.microsoft.com/office/drawing/2014/main" id="{46200D43-1290-4788-92D8-6A63024ACA8D}"/>
+                <a16:creationId xmlns:a16="http://schemas.microsoft.com/office/drawing/2014/main" id="{9EEFFA80-F25B-42D2-87E0-4F45C44417CD}"/>
               </a:ext>
             </a:extLst>
           </p:cNvPr>
@@ -9312,7 +9320,7 @@
           <p:cNvPr id="5" name="">
             <a:extLst xmlns:a="http://schemas.openxmlformats.org/drawingml/2006/main">
               <a:ext uri="{FF2B5EF4-FFF2-40B4-BE49-F238E27FC236}">
-                <a16:creationId xmlns:a16="http://schemas.microsoft.com/office/drawing/2014/main" id="{B07E3A23-F4C5-4778-819C-BF4F77B2ACBD}"/>
+                <a16:creationId xmlns:a16="http://schemas.microsoft.com/office/drawing/2014/main" id="{50A16ECC-C8D4-4405-AFC1-D67482AF43DD}"/>
               </a:ext>
             </a:extLst>
           </p:cNvPr>
@@ -9369,7 +9377,7 @@
           <p:cNvPr id="6" name="">
             <a:extLst xmlns:a="http://schemas.openxmlformats.org/drawingml/2006/main">
               <a:ext uri="{FF2B5EF4-FFF2-40B4-BE49-F238E27FC236}">
-                <a16:creationId xmlns:a16="http://schemas.microsoft.com/office/drawing/2014/main" id="{A47A2F75-2BAC-46A7-9090-B96F6B22D582}"/>
+                <a16:creationId xmlns:a16="http://schemas.microsoft.com/office/drawing/2014/main" id="{2339EA0F-4F70-42CD-8311-406907CB66F6}"/>
               </a:ext>
             </a:extLst>
           </p:cNvPr>
@@ -9426,7 +9434,7 @@
           <p:cNvPr id="7" name="">
             <a:extLst xmlns:a="http://schemas.openxmlformats.org/drawingml/2006/main">
               <a:ext uri="{FF2B5EF4-FFF2-40B4-BE49-F238E27FC236}">
-                <a16:creationId xmlns:a16="http://schemas.microsoft.com/office/drawing/2014/main" id="{80E74EE6-033E-4F28-AE53-D5E09A1F784A}"/>
+                <a16:creationId xmlns:a16="http://schemas.microsoft.com/office/drawing/2014/main" id="{D93BC677-E145-4654-B93F-6D71E770A920}"/>
               </a:ext>
             </a:extLst>
           </p:cNvPr>
@@ -9458,7 +9466,7 @@
           <p:cNvPr id="8" name="">
             <a:extLst xmlns:a="http://schemas.openxmlformats.org/drawingml/2006/main">
               <a:ext uri="{FF2B5EF4-FFF2-40B4-BE49-F238E27FC236}">
-                <a16:creationId xmlns:a16="http://schemas.microsoft.com/office/drawing/2014/main" id="{530174B3-3625-45AD-A365-098DEC4D75B0}"/>
+                <a16:creationId xmlns:a16="http://schemas.microsoft.com/office/drawing/2014/main" id="{95A4AACA-82BE-48A4-A3F0-A3BF108931BF}"/>
               </a:ext>
             </a:extLst>
           </p:cNvPr>
@@ -9515,7 +9523,7 @@
           <p:cNvPr id="9" name="">
             <a:extLst xmlns:a="http://schemas.openxmlformats.org/drawingml/2006/main">
               <a:ext uri="{FF2B5EF4-FFF2-40B4-BE49-F238E27FC236}">
-                <a16:creationId xmlns:a16="http://schemas.microsoft.com/office/drawing/2014/main" id="{855A4792-A046-47E3-9BC4-2D468F393246}"/>
+                <a16:creationId xmlns:a16="http://schemas.microsoft.com/office/drawing/2014/main" id="{389AFCC3-859E-4A65-9357-601055317D8F}"/>
               </a:ext>
             </a:extLst>
           </p:cNvPr>
@@ -9572,7 +9580,7 @@
           <p:cNvPr id="10" name="">
             <a:extLst xmlns:a="http://schemas.openxmlformats.org/drawingml/2006/main">
               <a:ext uri="{FF2B5EF4-FFF2-40B4-BE49-F238E27FC236}">
-                <a16:creationId xmlns:a16="http://schemas.microsoft.com/office/drawing/2014/main" id="{099B7FD9-B013-4E21-87A4-BEF9012FA6FC}"/>
+                <a16:creationId xmlns:a16="http://schemas.microsoft.com/office/drawing/2014/main" id="{52A7DB6F-6F02-4D7A-8E52-0FC17ED21F4F}"/>
               </a:ext>
             </a:extLst>
           </p:cNvPr>
@@ -9629,7 +9637,7 @@
           <p:cNvPr id="11" name="">
             <a:extLst xmlns:a="http://schemas.openxmlformats.org/drawingml/2006/main">
               <a:ext uri="{FF2B5EF4-FFF2-40B4-BE49-F238E27FC236}">
-                <a16:creationId xmlns:a16="http://schemas.microsoft.com/office/drawing/2014/main" id="{ACD3A3A2-9EDD-4E67-8827-3FF16BECD44D}"/>
+                <a16:creationId xmlns:a16="http://schemas.microsoft.com/office/drawing/2014/main" id="{4DF4B6B3-BEA8-463A-8F02-1B371A4F6551}"/>
               </a:ext>
             </a:extLst>
           </p:cNvPr>
@@ -9686,7 +9694,7 @@
           <p:cNvPr id="12" name="">
             <a:extLst xmlns:a="http://schemas.openxmlformats.org/drawingml/2006/main">
               <a:ext uri="{FF2B5EF4-FFF2-40B4-BE49-F238E27FC236}">
-                <a16:creationId xmlns:a16="http://schemas.microsoft.com/office/drawing/2014/main" id="{3CABE6D1-D2CF-429C-9E47-E333F01268E7}"/>
+                <a16:creationId xmlns:a16="http://schemas.microsoft.com/office/drawing/2014/main" id="{A44803B0-0A19-44ED-916A-0D9B7BED394E}"/>
               </a:ext>
             </a:extLst>
           </p:cNvPr>
@@ -9718,7 +9726,7 @@
           <p:cNvPr id="13" name="">
             <a:extLst xmlns:a="http://schemas.openxmlformats.org/drawingml/2006/main">
               <a:ext uri="{FF2B5EF4-FFF2-40B4-BE49-F238E27FC236}">
-                <a16:creationId xmlns:a16="http://schemas.microsoft.com/office/drawing/2014/main" id="{4C65D34E-518F-457E-A7BF-78C1F2A517C3}"/>
+                <a16:creationId xmlns:a16="http://schemas.microsoft.com/office/drawing/2014/main" id="{1713C81D-C9BB-41DE-B956-05B1F344BBEF}"/>
               </a:ext>
             </a:extLst>
           </p:cNvPr>
@@ -9775,7 +9783,7 @@
           <p:cNvPr id="14" name="">
             <a:extLst xmlns:a="http://schemas.openxmlformats.org/drawingml/2006/main">
               <a:ext uri="{FF2B5EF4-FFF2-40B4-BE49-F238E27FC236}">
-                <a16:creationId xmlns:a16="http://schemas.microsoft.com/office/drawing/2014/main" id="{49D4E342-9FAD-4CA1-B160-BE8152D86317}"/>
+                <a16:creationId xmlns:a16="http://schemas.microsoft.com/office/drawing/2014/main" id="{067CF316-F69F-4CFE-A372-1559A97041A9}"/>
               </a:ext>
             </a:extLst>
           </p:cNvPr>
@@ -9830,7 +9838,7 @@
     </p:spTree>
     <p:extLst>
       <p:ext uri="{BB962C8B-B14F-4D97-AF65-F5344CB8AC3E}">
-        <p14:creationId xmlns:p14="http://schemas.microsoft.com/office/powerpoint/2010/main" val="1224595119"/>
+        <p14:creationId xmlns:p14="http://schemas.microsoft.com/office/powerpoint/2010/main" val="1723483652"/>
       </p:ext>
     </p:extLst>
   </p:cSld>
@@ -10031,7 +10039,7 @@
           <p:cNvPr id="16" name="">
             <a:extLst xmlns:a="http://schemas.openxmlformats.org/drawingml/2006/main">
               <a:ext uri="{FF2B5EF4-FFF2-40B4-BE49-F238E27FC236}">
-                <a16:creationId xmlns:a16="http://schemas.microsoft.com/office/drawing/2014/main" id="{4FCBA820-BB06-4D2B-9FDD-1231CBC35481}"/>
+                <a16:creationId xmlns:a16="http://schemas.microsoft.com/office/drawing/2014/main" id="{DF2009BA-FE18-41E0-A108-9F632F2B9EAB}"/>
               </a:ext>
             </a:extLst>
           </p:cNvPr>
@@ -10063,7 +10071,7 @@
           <p:cNvPr id="2" name="">
             <a:extLst xmlns:a="http://schemas.openxmlformats.org/drawingml/2006/main">
               <a:ext uri="{FF2B5EF4-FFF2-40B4-BE49-F238E27FC236}">
-                <a16:creationId xmlns:a16="http://schemas.microsoft.com/office/drawing/2014/main" id="{C86817EC-5D50-439A-A28B-3384D98C6316}"/>
+                <a16:creationId xmlns:a16="http://schemas.microsoft.com/office/drawing/2014/main" id="{DF2ACC7E-7CA0-4AE6-A4A2-9FA2D54AE5F9}"/>
               </a:ext>
             </a:extLst>
           </p:cNvPr>
@@ -10120,7 +10128,7 @@
           <p:cNvPr id="3" name="">
             <a:extLst xmlns:a="http://schemas.openxmlformats.org/drawingml/2006/main">
               <a:ext uri="{FF2B5EF4-FFF2-40B4-BE49-F238E27FC236}">
-                <a16:creationId xmlns:a16="http://schemas.microsoft.com/office/drawing/2014/main" id="{5208A6FF-A27A-484D-B9C9-4B7460FCCD17}"/>
+                <a16:creationId xmlns:a16="http://schemas.microsoft.com/office/drawing/2014/main" id="{6FE0541E-F380-4EF1-96A7-4AAC9409C3DA}"/>
               </a:ext>
             </a:extLst>
           </p:cNvPr>
@@ -10152,7 +10160,7 @@
           <p:cNvPr id="4" name="">
             <a:extLst xmlns:a="http://schemas.openxmlformats.org/drawingml/2006/main">
               <a:ext uri="{FF2B5EF4-FFF2-40B4-BE49-F238E27FC236}">
-                <a16:creationId xmlns:a16="http://schemas.microsoft.com/office/drawing/2014/main" id="{53C87CDD-F602-4BC5-ABCA-0E34D21B0D84}"/>
+                <a16:creationId xmlns:a16="http://schemas.microsoft.com/office/drawing/2014/main" id="{8F791024-4A93-494C-AAC1-F03770723B96}"/>
               </a:ext>
             </a:extLst>
           </p:cNvPr>
@@ -10209,7 +10217,7 @@
           <p:cNvPr id="5" name="">
             <a:extLst xmlns:a="http://schemas.openxmlformats.org/drawingml/2006/main">
               <a:ext uri="{FF2B5EF4-FFF2-40B4-BE49-F238E27FC236}">
-                <a16:creationId xmlns:a16="http://schemas.microsoft.com/office/drawing/2014/main" id="{CE96DD5F-D424-4B6F-8BC7-96D3BAACC67E}"/>
+                <a16:creationId xmlns:a16="http://schemas.microsoft.com/office/drawing/2014/main" id="{FFD488CD-7C35-4BA9-BE36-E0BA11931D96}"/>
               </a:ext>
             </a:extLst>
           </p:cNvPr>
@@ -10266,7 +10274,7 @@
           <p:cNvPr id="6" name="">
             <a:extLst xmlns:a="http://schemas.openxmlformats.org/drawingml/2006/main">
               <a:ext uri="{FF2B5EF4-FFF2-40B4-BE49-F238E27FC236}">
-                <a16:creationId xmlns:a16="http://schemas.microsoft.com/office/drawing/2014/main" id="{C1D69D52-DD64-4049-8B1F-CCD76AF46293}"/>
+                <a16:creationId xmlns:a16="http://schemas.microsoft.com/office/drawing/2014/main" id="{F9E77756-C147-44EE-9502-D4E279D5B2EC}"/>
               </a:ext>
             </a:extLst>
           </p:cNvPr>
@@ -10323,7 +10331,7 @@
           <p:cNvPr id="7" name="">
             <a:extLst xmlns:a="http://schemas.openxmlformats.org/drawingml/2006/main">
               <a:ext uri="{FF2B5EF4-FFF2-40B4-BE49-F238E27FC236}">
-                <a16:creationId xmlns:a16="http://schemas.microsoft.com/office/drawing/2014/main" id="{E1C8829E-0359-483C-AC62-30402CBEFAC3}"/>
+                <a16:creationId xmlns:a16="http://schemas.microsoft.com/office/drawing/2014/main" id="{8CBAD3C1-85BE-4655-B555-B02C3CCF70BE}"/>
               </a:ext>
             </a:extLst>
           </p:cNvPr>
@@ -10355,7 +10363,7 @@
           <p:cNvPr id="8" name="">
             <a:extLst xmlns:a="http://schemas.openxmlformats.org/drawingml/2006/main">
               <a:ext uri="{FF2B5EF4-FFF2-40B4-BE49-F238E27FC236}">
-                <a16:creationId xmlns:a16="http://schemas.microsoft.com/office/drawing/2014/main" id="{35D19567-1123-4B74-BB8D-C8926ED96B86}"/>
+                <a16:creationId xmlns:a16="http://schemas.microsoft.com/office/drawing/2014/main" id="{E4D16624-95DC-45CE-A753-622F13BC0C50}"/>
               </a:ext>
             </a:extLst>
           </p:cNvPr>
@@ -10412,7 +10420,7 @@
           <p:cNvPr id="9" name="">
             <a:extLst xmlns:a="http://schemas.openxmlformats.org/drawingml/2006/main">
               <a:ext uri="{FF2B5EF4-FFF2-40B4-BE49-F238E27FC236}">
-                <a16:creationId xmlns:a16="http://schemas.microsoft.com/office/drawing/2014/main" id="{E360AE84-822B-41B5-9C59-0FE0AE95E6E3}"/>
+                <a16:creationId xmlns:a16="http://schemas.microsoft.com/office/drawing/2014/main" id="{A7D4E727-9AA4-460F-9C19-96ED12987004}"/>
               </a:ext>
             </a:extLst>
           </p:cNvPr>
@@ -10469,7 +10477,7 @@
           <p:cNvPr id="10" name="">
             <a:extLst xmlns:a="http://schemas.openxmlformats.org/drawingml/2006/main">
               <a:ext uri="{FF2B5EF4-FFF2-40B4-BE49-F238E27FC236}">
-                <a16:creationId xmlns:a16="http://schemas.microsoft.com/office/drawing/2014/main" id="{809FDD1B-01A4-4E5C-AC12-44418BD4AE7C}"/>
+                <a16:creationId xmlns:a16="http://schemas.microsoft.com/office/drawing/2014/main" id="{4B7E9A85-5207-4369-B457-C671C779D69C}"/>
               </a:ext>
             </a:extLst>
           </p:cNvPr>
@@ -10526,7 +10534,7 @@
           <p:cNvPr id="11" name="">
             <a:extLst xmlns:a="http://schemas.openxmlformats.org/drawingml/2006/main">
               <a:ext uri="{FF2B5EF4-FFF2-40B4-BE49-F238E27FC236}">
-                <a16:creationId xmlns:a16="http://schemas.microsoft.com/office/drawing/2014/main" id="{B35B9F69-16BC-4F2A-BACA-847083EBC760}"/>
+                <a16:creationId xmlns:a16="http://schemas.microsoft.com/office/drawing/2014/main" id="{4C3F47C7-0A14-4A62-A10D-071477406814}"/>
               </a:ext>
             </a:extLst>
           </p:cNvPr>
@@ -10583,7 +10591,7 @@
           <p:cNvPr id="12" name="">
             <a:extLst xmlns:a="http://schemas.openxmlformats.org/drawingml/2006/main">
               <a:ext uri="{FF2B5EF4-FFF2-40B4-BE49-F238E27FC236}">
-                <a16:creationId xmlns:a16="http://schemas.microsoft.com/office/drawing/2014/main" id="{8852BFD7-8B28-40BB-A659-9B685206AB00}"/>
+                <a16:creationId xmlns:a16="http://schemas.microsoft.com/office/drawing/2014/main" id="{9D5B3492-4945-41DA-868E-E998FF3C95BF}"/>
               </a:ext>
             </a:extLst>
           </p:cNvPr>
@@ -10640,7 +10648,7 @@
           <p:cNvPr id="13" name="">
             <a:extLst xmlns:a="http://schemas.openxmlformats.org/drawingml/2006/main">
               <a:ext uri="{FF2B5EF4-FFF2-40B4-BE49-F238E27FC236}">
-                <a16:creationId xmlns:a16="http://schemas.microsoft.com/office/drawing/2014/main" id="{A10DC6AB-76F4-41CF-873D-C6F2477AE37A}"/>
+                <a16:creationId xmlns:a16="http://schemas.microsoft.com/office/drawing/2014/main" id="{336D9097-24E5-4B21-8FF2-E6896BE5182D}"/>
               </a:ext>
             </a:extLst>
           </p:cNvPr>
@@ -10697,7 +10705,7 @@
           <p:cNvPr id="14" name="">
             <a:extLst xmlns:a="http://schemas.openxmlformats.org/drawingml/2006/main">
               <a:ext uri="{FF2B5EF4-FFF2-40B4-BE49-F238E27FC236}">
-                <a16:creationId xmlns:a16="http://schemas.microsoft.com/office/drawing/2014/main" id="{661B430F-5E82-4125-96A1-FCAB84CF0012}"/>
+                <a16:creationId xmlns:a16="http://schemas.microsoft.com/office/drawing/2014/main" id="{1181B96A-7392-44D4-BC01-7F1B2CE81B96}"/>
               </a:ext>
             </a:extLst>
           </p:cNvPr>
@@ -10754,7 +10762,7 @@
           <p:cNvPr id="15" name="">
             <a:extLst xmlns:a="http://schemas.openxmlformats.org/drawingml/2006/main">
               <a:ext uri="{FF2B5EF4-FFF2-40B4-BE49-F238E27FC236}">
-                <a16:creationId xmlns:a16="http://schemas.microsoft.com/office/drawing/2014/main" id="{2102E6F9-6CDD-47F5-AD40-F0366B4E10CB}"/>
+                <a16:creationId xmlns:a16="http://schemas.microsoft.com/office/drawing/2014/main" id="{3D92E79A-93CC-4EB0-B2D0-E2581A8DACF1}"/>
               </a:ext>
             </a:extLst>
           </p:cNvPr>
@@ -10809,7 +10817,7 @@
     </p:spTree>
     <p:extLst>
       <p:ext uri="{BB962C8B-B14F-4D97-AF65-F5344CB8AC3E}">
-        <p14:creationId xmlns:p14="http://schemas.microsoft.com/office/powerpoint/2010/main" val="755532051"/>
+        <p14:creationId xmlns:p14="http://schemas.microsoft.com/office/powerpoint/2010/main" val="1998117794"/>
       </p:ext>
     </p:extLst>
   </p:cSld>
@@ -10964,7 +10972,7 @@
           <p:cNvPr id="16" name="">
             <a:extLst xmlns:a="http://schemas.openxmlformats.org/drawingml/2006/main">
               <a:ext uri="{FF2B5EF4-FFF2-40B4-BE49-F238E27FC236}">
-                <a16:creationId xmlns:a16="http://schemas.microsoft.com/office/drawing/2014/main" id="{D06981C9-6F61-4889-93D0-3D082494C340}"/>
+                <a16:creationId xmlns:a16="http://schemas.microsoft.com/office/drawing/2014/main" id="{543F9572-D386-4D1C-AD93-8D84B5FD9E06}"/>
               </a:ext>
             </a:extLst>
           </p:cNvPr>
@@ -10996,7 +11004,7 @@
           <p:cNvPr id="2" name="">
             <a:extLst xmlns:a="http://schemas.openxmlformats.org/drawingml/2006/main">
               <a:ext uri="{FF2B5EF4-FFF2-40B4-BE49-F238E27FC236}">
-                <a16:creationId xmlns:a16="http://schemas.microsoft.com/office/drawing/2014/main" id="{5ECA42DC-EECD-419A-A9E9-4B12F3B4E292}"/>
+                <a16:creationId xmlns:a16="http://schemas.microsoft.com/office/drawing/2014/main" id="{D2717904-3818-48C5-ADAE-23DF89708D81}"/>
               </a:ext>
             </a:extLst>
           </p:cNvPr>
@@ -11053,7 +11061,7 @@
           <p:cNvPr id="3" name="">
             <a:extLst xmlns:a="http://schemas.openxmlformats.org/drawingml/2006/main">
               <a:ext uri="{FF2B5EF4-FFF2-40B4-BE49-F238E27FC236}">
-                <a16:creationId xmlns:a16="http://schemas.microsoft.com/office/drawing/2014/main" id="{652F446C-4019-4995-86AE-47B13F473159}"/>
+                <a16:creationId xmlns:a16="http://schemas.microsoft.com/office/drawing/2014/main" id="{2A535110-DC12-4ED7-B173-EBD5DD353A42}"/>
               </a:ext>
             </a:extLst>
           </p:cNvPr>
@@ -11085,7 +11093,7 @@
           <p:cNvPr id="4" name="">
             <a:extLst xmlns:a="http://schemas.openxmlformats.org/drawingml/2006/main">
               <a:ext uri="{FF2B5EF4-FFF2-40B4-BE49-F238E27FC236}">
-                <a16:creationId xmlns:a16="http://schemas.microsoft.com/office/drawing/2014/main" id="{E24724C8-2FD9-4B42-891D-B59CBE873B67}"/>
+                <a16:creationId xmlns:a16="http://schemas.microsoft.com/office/drawing/2014/main" id="{584A150A-1C8C-44DE-ABEF-79D0137B0AEE}"/>
               </a:ext>
             </a:extLst>
           </p:cNvPr>
@@ -11142,7 +11150,7 @@
           <p:cNvPr id="5" name="">
             <a:extLst xmlns:a="http://schemas.openxmlformats.org/drawingml/2006/main">
               <a:ext uri="{FF2B5EF4-FFF2-40B4-BE49-F238E27FC236}">
-                <a16:creationId xmlns:a16="http://schemas.microsoft.com/office/drawing/2014/main" id="{8EE93012-7EFE-4479-B5CA-E66BB7BDE918}"/>
+                <a16:creationId xmlns:a16="http://schemas.microsoft.com/office/drawing/2014/main" id="{DA5E4CD0-9BF7-4B4D-8F65-A35B70F22A2E}"/>
               </a:ext>
             </a:extLst>
           </p:cNvPr>
@@ -11199,7 +11207,7 @@
           <p:cNvPr id="6" name="">
             <a:extLst xmlns:a="http://schemas.openxmlformats.org/drawingml/2006/main">
               <a:ext uri="{FF2B5EF4-FFF2-40B4-BE49-F238E27FC236}">
-                <a16:creationId xmlns:a16="http://schemas.microsoft.com/office/drawing/2014/main" id="{EF569194-8FFB-468E-84E7-38DE28A042FE}"/>
+                <a16:creationId xmlns:a16="http://schemas.microsoft.com/office/drawing/2014/main" id="{DA8B618F-FF48-43AE-B05D-EA04447821EA}"/>
               </a:ext>
             </a:extLst>
           </p:cNvPr>
@@ -11256,7 +11264,7 @@
           <p:cNvPr id="7" name="">
             <a:extLst xmlns:a="http://schemas.openxmlformats.org/drawingml/2006/main">
               <a:ext uri="{FF2B5EF4-FFF2-40B4-BE49-F238E27FC236}">
-                <a16:creationId xmlns:a16="http://schemas.microsoft.com/office/drawing/2014/main" id="{FC6BC884-42A6-4A57-8ECD-B67951216713}"/>
+                <a16:creationId xmlns:a16="http://schemas.microsoft.com/office/drawing/2014/main" id="{E4DD29D0-A851-4DCD-9009-C98622A6A8F5}"/>
               </a:ext>
             </a:extLst>
           </p:cNvPr>
@@ -11288,7 +11296,7 @@
           <p:cNvPr id="8" name="">
             <a:extLst xmlns:a="http://schemas.openxmlformats.org/drawingml/2006/main">
               <a:ext uri="{FF2B5EF4-FFF2-40B4-BE49-F238E27FC236}">
-                <a16:creationId xmlns:a16="http://schemas.microsoft.com/office/drawing/2014/main" id="{B776069D-A0D3-4FE8-AB89-B60BBFF7BF6E}"/>
+                <a16:creationId xmlns:a16="http://schemas.microsoft.com/office/drawing/2014/main" id="{1CFDC522-A53D-4174-9159-7D5738D3B975}"/>
               </a:ext>
             </a:extLst>
           </p:cNvPr>
@@ -11345,7 +11353,7 @@
           <p:cNvPr id="9" name="">
             <a:extLst xmlns:a="http://schemas.openxmlformats.org/drawingml/2006/main">
               <a:ext uri="{FF2B5EF4-FFF2-40B4-BE49-F238E27FC236}">
-                <a16:creationId xmlns:a16="http://schemas.microsoft.com/office/drawing/2014/main" id="{66A84213-1485-4A24-AD60-FB82ACABB0A1}"/>
+                <a16:creationId xmlns:a16="http://schemas.microsoft.com/office/drawing/2014/main" id="{A87A9331-2AAD-4BAD-B178-FB231D92C582}"/>
               </a:ext>
             </a:extLst>
           </p:cNvPr>
@@ -11406,7 +11414,7 @@
           <p:nvPr/>
         </p:nvPicPr>
         <p:blipFill>
-          <a:blip xmlns:r="http://schemas.openxmlformats.org/officeDocument/2006/relationships" xmlns:a="http://schemas.openxmlformats.org/drawingml/2006/main" r:embed="R4f84a93c8d084b52"/>
+          <a:blip xmlns:r="http://schemas.openxmlformats.org/officeDocument/2006/relationships" xmlns:a="http://schemas.openxmlformats.org/drawingml/2006/main" r:embed="Rf163060639a3489b"/>
           <a:stretch xmlns:a="http://schemas.openxmlformats.org/drawingml/2006/main"/>
         </p:blipFill>
         <p:spPr>
@@ -11424,7 +11432,7 @@
           <p:cNvPr id="11" name="">
             <a:extLst xmlns:a="http://schemas.openxmlformats.org/drawingml/2006/main">
               <a:ext uri="{FF2B5EF4-FFF2-40B4-BE49-F238E27FC236}">
-                <a16:creationId xmlns:a16="http://schemas.microsoft.com/office/drawing/2014/main" id="{1FD77C16-DEE4-4A69-9222-8CF1A669FF26}"/>
+                <a16:creationId xmlns:a16="http://schemas.microsoft.com/office/drawing/2014/main" id="{2E2407D4-E7E5-42EE-8DE6-0B0DC2D88C91}"/>
               </a:ext>
             </a:extLst>
           </p:cNvPr>
@@ -11481,7 +11489,7 @@
           <p:cNvPr id="12" name="">
             <a:extLst xmlns:a="http://schemas.openxmlformats.org/drawingml/2006/main">
               <a:ext uri="{FF2B5EF4-FFF2-40B4-BE49-F238E27FC236}">
-                <a16:creationId xmlns:a16="http://schemas.microsoft.com/office/drawing/2014/main" id="{57DEF757-FCA2-47A5-873D-B3B9420F15DF}"/>
+                <a16:creationId xmlns:a16="http://schemas.microsoft.com/office/drawing/2014/main" id="{91EC5738-F8D2-430A-9973-A945C0FFB097}"/>
               </a:ext>
             </a:extLst>
           </p:cNvPr>
@@ -11538,7 +11546,7 @@
           <p:cNvPr id="13" name="">
             <a:extLst xmlns:a="http://schemas.openxmlformats.org/drawingml/2006/main">
               <a:ext uri="{FF2B5EF4-FFF2-40B4-BE49-F238E27FC236}">
-                <a16:creationId xmlns:a16="http://schemas.microsoft.com/office/drawing/2014/main" id="{70E1C660-BD13-4694-946E-AB834690604C}"/>
+                <a16:creationId xmlns:a16="http://schemas.microsoft.com/office/drawing/2014/main" id="{EA36D35F-3607-4A3C-85BC-E740DA3FB9FA}"/>
               </a:ext>
             </a:extLst>
           </p:cNvPr>
@@ -11570,7 +11578,7 @@
           <p:cNvPr id="14" name="">
             <a:extLst xmlns:a="http://schemas.openxmlformats.org/drawingml/2006/main">
               <a:ext uri="{FF2B5EF4-FFF2-40B4-BE49-F238E27FC236}">
-                <a16:creationId xmlns:a16="http://schemas.microsoft.com/office/drawing/2014/main" id="{14DABBAE-9125-4136-9EE3-894DC414DE97}"/>
+                <a16:creationId xmlns:a16="http://schemas.microsoft.com/office/drawing/2014/main" id="{72C2E82C-AF21-414A-9B1F-8B9106D67296}"/>
               </a:ext>
             </a:extLst>
           </p:cNvPr>
@@ -11627,7 +11635,7 @@
           <p:cNvPr id="15" name="">
             <a:extLst xmlns:a="http://schemas.openxmlformats.org/drawingml/2006/main">
               <a:ext uri="{FF2B5EF4-FFF2-40B4-BE49-F238E27FC236}">
-                <a16:creationId xmlns:a16="http://schemas.microsoft.com/office/drawing/2014/main" id="{8B1E7FFE-9832-4023-9AE9-8F6784CC3D55}"/>
+                <a16:creationId xmlns:a16="http://schemas.microsoft.com/office/drawing/2014/main" id="{87F18510-8A40-46EF-BEBA-24557AEBA2CA}"/>
               </a:ext>
             </a:extLst>
           </p:cNvPr>
@@ -11682,7 +11690,7 @@
     </p:spTree>
     <p:extLst>
       <p:ext uri="{BB962C8B-B14F-4D97-AF65-F5344CB8AC3E}">
-        <p14:creationId xmlns:p14="http://schemas.microsoft.com/office/powerpoint/2010/main" val="1338443091"/>
+        <p14:creationId xmlns:p14="http://schemas.microsoft.com/office/powerpoint/2010/main" val="1447824783"/>
       </p:ext>
     </p:extLst>
   </p:cSld>
@@ -11837,7 +11845,7 @@
           <p:cNvPr id="23" name="">
             <a:extLst xmlns:a="http://schemas.openxmlformats.org/drawingml/2006/main">
               <a:ext uri="{FF2B5EF4-FFF2-40B4-BE49-F238E27FC236}">
-                <a16:creationId xmlns:a16="http://schemas.microsoft.com/office/drawing/2014/main" id="{032C3F54-ECE3-4CBE-B3A1-19800F6F75D1}"/>
+                <a16:creationId xmlns:a16="http://schemas.microsoft.com/office/drawing/2014/main" id="{737C9FDD-A2C9-4D67-B750-84BF11A04372}"/>
               </a:ext>
             </a:extLst>
           </p:cNvPr>
@@ -11869,7 +11877,7 @@
           <p:cNvPr id="2" name="">
             <a:extLst xmlns:a="http://schemas.openxmlformats.org/drawingml/2006/main">
               <a:ext uri="{FF2B5EF4-FFF2-40B4-BE49-F238E27FC236}">
-                <a16:creationId xmlns:a16="http://schemas.microsoft.com/office/drawing/2014/main" id="{DC64ABD1-8268-46DA-AAD6-2F67764C4E60}"/>
+                <a16:creationId xmlns:a16="http://schemas.microsoft.com/office/drawing/2014/main" id="{278A4A30-1358-492C-9323-898338761558}"/>
               </a:ext>
             </a:extLst>
           </p:cNvPr>
@@ -11926,7 +11934,7 @@
           <p:cNvPr id="3" name="">
             <a:extLst xmlns:a="http://schemas.openxmlformats.org/drawingml/2006/main">
               <a:ext uri="{FF2B5EF4-FFF2-40B4-BE49-F238E27FC236}">
-                <a16:creationId xmlns:a16="http://schemas.microsoft.com/office/drawing/2014/main" id="{11537F2B-E701-4981-8657-0514865385E0}"/>
+                <a16:creationId xmlns:a16="http://schemas.microsoft.com/office/drawing/2014/main" id="{AD9057C4-512F-4912-9847-F0429B53A328}"/>
               </a:ext>
             </a:extLst>
           </p:cNvPr>
@@ -11958,7 +11966,7 @@
           <p:cNvPr id="4" name="">
             <a:extLst xmlns:a="http://schemas.openxmlformats.org/drawingml/2006/main">
               <a:ext uri="{FF2B5EF4-FFF2-40B4-BE49-F238E27FC236}">
-                <a16:creationId xmlns:a16="http://schemas.microsoft.com/office/drawing/2014/main" id="{367BAB89-6240-4F90-A3EE-B298D8AEC32B}"/>
+                <a16:creationId xmlns:a16="http://schemas.microsoft.com/office/drawing/2014/main" id="{2CADC624-926D-4EE5-8209-6BC13D2661DE}"/>
               </a:ext>
             </a:extLst>
           </p:cNvPr>
@@ -12015,7 +12023,7 @@
           <p:cNvPr id="5" name="">
             <a:extLst xmlns:a="http://schemas.openxmlformats.org/drawingml/2006/main">
               <a:ext uri="{FF2B5EF4-FFF2-40B4-BE49-F238E27FC236}">
-                <a16:creationId xmlns:a16="http://schemas.microsoft.com/office/drawing/2014/main" id="{55DA3E95-9CC9-425E-9838-D5A9938C2CEC}"/>
+                <a16:creationId xmlns:a16="http://schemas.microsoft.com/office/drawing/2014/main" id="{D3ED9A5F-B0F9-40A4-ABDD-5E9FC8F95C17}"/>
               </a:ext>
             </a:extLst>
           </p:cNvPr>
@@ -12072,7 +12080,7 @@
           <p:cNvPr id="6" name="">
             <a:extLst xmlns:a="http://schemas.openxmlformats.org/drawingml/2006/main">
               <a:ext uri="{FF2B5EF4-FFF2-40B4-BE49-F238E27FC236}">
-                <a16:creationId xmlns:a16="http://schemas.microsoft.com/office/drawing/2014/main" id="{E1D158F3-6DD3-47FD-A7A4-9665A687494D}"/>
+                <a16:creationId xmlns:a16="http://schemas.microsoft.com/office/drawing/2014/main" id="{15655D21-9110-451C-A14B-C2D0C7C775D1}"/>
               </a:ext>
             </a:extLst>
           </p:cNvPr>
@@ -12129,7 +12137,7 @@
           <p:cNvPr id="7" name="">
             <a:extLst xmlns:a="http://schemas.openxmlformats.org/drawingml/2006/main">
               <a:ext uri="{FF2B5EF4-FFF2-40B4-BE49-F238E27FC236}">
-                <a16:creationId xmlns:a16="http://schemas.microsoft.com/office/drawing/2014/main" id="{89DE3A9C-43E6-42C4-A683-CE4E9525E719}"/>
+                <a16:creationId xmlns:a16="http://schemas.microsoft.com/office/drawing/2014/main" id="{CCEA1D5D-55DA-4B97-9304-C3B16771A5E0}"/>
               </a:ext>
             </a:extLst>
           </p:cNvPr>
@@ -12161,7 +12169,7 @@
           <p:cNvPr id="8" name="">
             <a:extLst xmlns:a="http://schemas.openxmlformats.org/drawingml/2006/main">
               <a:ext uri="{FF2B5EF4-FFF2-40B4-BE49-F238E27FC236}">
-                <a16:creationId xmlns:a16="http://schemas.microsoft.com/office/drawing/2014/main" id="{D14BC46D-7619-45F9-BDA0-B32A8226BBFB}"/>
+                <a16:creationId xmlns:a16="http://schemas.microsoft.com/office/drawing/2014/main" id="{04CD39D4-7D66-4ED3-B5AC-79E1BAA38DB6}"/>
               </a:ext>
             </a:extLst>
           </p:cNvPr>
@@ -12218,7 +12226,7 @@
           <p:cNvPr id="9" name="">
             <a:extLst xmlns:a="http://schemas.openxmlformats.org/drawingml/2006/main">
               <a:ext uri="{FF2B5EF4-FFF2-40B4-BE49-F238E27FC236}">
-                <a16:creationId xmlns:a16="http://schemas.microsoft.com/office/drawing/2014/main" id="{7C653BC4-0CB3-4494-BF50-42F18DC198FB}"/>
+                <a16:creationId xmlns:a16="http://schemas.microsoft.com/office/drawing/2014/main" id="{0AC39132-A0DD-4AD3-A588-4343246FF6FA}"/>
               </a:ext>
             </a:extLst>
           </p:cNvPr>
@@ -12275,7 +12283,7 @@
           <p:cNvPr id="10" name="">
             <a:extLst xmlns:a="http://schemas.openxmlformats.org/drawingml/2006/main">
               <a:ext uri="{FF2B5EF4-FFF2-40B4-BE49-F238E27FC236}">
-                <a16:creationId xmlns:a16="http://schemas.microsoft.com/office/drawing/2014/main" id="{3C63AF22-DDB9-406C-BB9D-C15D3724B586}"/>
+                <a16:creationId xmlns:a16="http://schemas.microsoft.com/office/drawing/2014/main" id="{6595A42E-6581-4315-A714-231316C3A501}"/>
               </a:ext>
             </a:extLst>
           </p:cNvPr>
@@ -12309,7 +12317,7 @@
           <p:cNvPr id="11" name="">
             <a:extLst xmlns:a="http://schemas.openxmlformats.org/drawingml/2006/main">
               <a:ext uri="{FF2B5EF4-FFF2-40B4-BE49-F238E27FC236}">
-                <a16:creationId xmlns:a16="http://schemas.microsoft.com/office/drawing/2014/main" id="{BACAA93B-16AE-4843-8F0E-7ACBD83DDFD0}"/>
+                <a16:creationId xmlns:a16="http://schemas.microsoft.com/office/drawing/2014/main" id="{09ACC8E6-7B4D-4C5D-BB62-8F4C5DFFD377}"/>
               </a:ext>
             </a:extLst>
           </p:cNvPr>
@@ -12341,7 +12349,7 @@
           <p:cNvPr id="12" name="">
             <a:extLst xmlns:a="http://schemas.openxmlformats.org/drawingml/2006/main">
               <a:ext uri="{FF2B5EF4-FFF2-40B4-BE49-F238E27FC236}">
-                <a16:creationId xmlns:a16="http://schemas.microsoft.com/office/drawing/2014/main" id="{8B670E90-D4A1-42EB-80E1-121155654F08}"/>
+                <a16:creationId xmlns:a16="http://schemas.microsoft.com/office/drawing/2014/main" id="{BAEBFF3F-6694-455E-A060-218A8D22647A}"/>
               </a:ext>
             </a:extLst>
           </p:cNvPr>
@@ -12398,7 +12406,7 @@
           <p:cNvPr id="13" name="">
             <a:extLst xmlns:a="http://schemas.openxmlformats.org/drawingml/2006/main">
               <a:ext uri="{FF2B5EF4-FFF2-40B4-BE49-F238E27FC236}">
-                <a16:creationId xmlns:a16="http://schemas.microsoft.com/office/drawing/2014/main" id="{A95FBDD0-3DA6-4CF0-B76E-4EDEB483911B}"/>
+                <a16:creationId xmlns:a16="http://schemas.microsoft.com/office/drawing/2014/main" id="{EFDD3CE7-1587-4DF0-ADF6-009B7BDF601B}"/>
               </a:ext>
             </a:extLst>
           </p:cNvPr>
@@ -12455,7 +12463,7 @@
           <p:cNvPr id="14" name="">
             <a:extLst xmlns:a="http://schemas.openxmlformats.org/drawingml/2006/main">
               <a:ext uri="{FF2B5EF4-FFF2-40B4-BE49-F238E27FC236}">
-                <a16:creationId xmlns:a16="http://schemas.microsoft.com/office/drawing/2014/main" id="{67374AFD-6B63-4569-84FD-A3708839A6BE}"/>
+                <a16:creationId xmlns:a16="http://schemas.microsoft.com/office/drawing/2014/main" id="{536A2D21-DCDE-44BE-BA2B-094F6AA978EE}"/>
               </a:ext>
             </a:extLst>
           </p:cNvPr>
@@ -12489,7 +12497,7 @@
           <p:cNvPr id="15" name="">
             <a:extLst xmlns:a="http://schemas.openxmlformats.org/drawingml/2006/main">
               <a:ext uri="{FF2B5EF4-FFF2-40B4-BE49-F238E27FC236}">
-                <a16:creationId xmlns:a16="http://schemas.microsoft.com/office/drawing/2014/main" id="{CBD0998D-A230-43FE-99D7-E536EAA5ECC5}"/>
+                <a16:creationId xmlns:a16="http://schemas.microsoft.com/office/drawing/2014/main" id="{92A7CC8B-864D-4633-8E04-C5D0BE1DE2D5}"/>
               </a:ext>
             </a:extLst>
           </p:cNvPr>
@@ -12521,7 +12529,7 @@
           <p:cNvPr id="16" name="">
             <a:extLst xmlns:a="http://schemas.openxmlformats.org/drawingml/2006/main">
               <a:ext uri="{FF2B5EF4-FFF2-40B4-BE49-F238E27FC236}">
-                <a16:creationId xmlns:a16="http://schemas.microsoft.com/office/drawing/2014/main" id="{FB87200B-66F9-49CF-82E5-142CF6AE1455}"/>
+                <a16:creationId xmlns:a16="http://schemas.microsoft.com/office/drawing/2014/main" id="{31FAABC9-1E98-4EF3-9AFD-49BCB4383BDF}"/>
               </a:ext>
             </a:extLst>
           </p:cNvPr>
@@ -12578,7 +12586,7 @@
           <p:cNvPr id="17" name="">
             <a:extLst xmlns:a="http://schemas.openxmlformats.org/drawingml/2006/main">
               <a:ext uri="{FF2B5EF4-FFF2-40B4-BE49-F238E27FC236}">
-                <a16:creationId xmlns:a16="http://schemas.microsoft.com/office/drawing/2014/main" id="{0DA88511-1020-41BE-8F13-0AA445DB9749}"/>
+                <a16:creationId xmlns:a16="http://schemas.microsoft.com/office/drawing/2014/main" id="{07F6D9B1-D84A-43A8-B11A-19A54066C155}"/>
               </a:ext>
             </a:extLst>
           </p:cNvPr>
@@ -12635,7 +12643,7 @@
           <p:cNvPr id="18" name="">
             <a:extLst xmlns:a="http://schemas.openxmlformats.org/drawingml/2006/main">
               <a:ext uri="{FF2B5EF4-FFF2-40B4-BE49-F238E27FC236}">
-                <a16:creationId xmlns:a16="http://schemas.microsoft.com/office/drawing/2014/main" id="{0C2A0907-C641-45FA-A9CF-ADC6A6793BF5}"/>
+                <a16:creationId xmlns:a16="http://schemas.microsoft.com/office/drawing/2014/main" id="{6473887B-06F7-46D3-A17E-BA4B4A0EDE80}"/>
               </a:ext>
             </a:extLst>
           </p:cNvPr>
@@ -12669,7 +12677,7 @@
           <p:cNvPr id="19" name="">
             <a:extLst xmlns:a="http://schemas.openxmlformats.org/drawingml/2006/main">
               <a:ext uri="{FF2B5EF4-FFF2-40B4-BE49-F238E27FC236}">
-                <a16:creationId xmlns:a16="http://schemas.microsoft.com/office/drawing/2014/main" id="{229AA662-66CD-4EC0-B3D5-B2CAE5A535AF}"/>
+                <a16:creationId xmlns:a16="http://schemas.microsoft.com/office/drawing/2014/main" id="{BF06C071-1B94-46BF-A8BA-824307C4D091}"/>
               </a:ext>
             </a:extLst>
           </p:cNvPr>
@@ -12701,7 +12709,7 @@
           <p:cNvPr id="20" name="">
             <a:extLst xmlns:a="http://schemas.openxmlformats.org/drawingml/2006/main">
               <a:ext uri="{FF2B5EF4-FFF2-40B4-BE49-F238E27FC236}">
-                <a16:creationId xmlns:a16="http://schemas.microsoft.com/office/drawing/2014/main" id="{65CB0ECB-04EB-4643-AAC9-DFFA3BC71D29}"/>
+                <a16:creationId xmlns:a16="http://schemas.microsoft.com/office/drawing/2014/main" id="{4CB5575A-7F1C-45A0-BD69-E32EB6090259}"/>
               </a:ext>
             </a:extLst>
           </p:cNvPr>
@@ -12758,7 +12766,7 @@
           <p:cNvPr id="21" name="">
             <a:extLst xmlns:a="http://schemas.openxmlformats.org/drawingml/2006/main">
               <a:ext uri="{FF2B5EF4-FFF2-40B4-BE49-F238E27FC236}">
-                <a16:creationId xmlns:a16="http://schemas.microsoft.com/office/drawing/2014/main" id="{F9F09A6D-FC69-430F-BDFD-048308B31DF2}"/>
+                <a16:creationId xmlns:a16="http://schemas.microsoft.com/office/drawing/2014/main" id="{F99E6896-C259-49EC-8F79-97C2CAF41341}"/>
               </a:ext>
             </a:extLst>
           </p:cNvPr>
@@ -12815,7 +12823,7 @@
           <p:cNvPr id="22" name="">
             <a:extLst xmlns:a="http://schemas.openxmlformats.org/drawingml/2006/main">
               <a:ext uri="{FF2B5EF4-FFF2-40B4-BE49-F238E27FC236}">
-                <a16:creationId xmlns:a16="http://schemas.microsoft.com/office/drawing/2014/main" id="{8B70A99F-39AD-40C1-B644-1C0128D1E239}"/>
+                <a16:creationId xmlns:a16="http://schemas.microsoft.com/office/drawing/2014/main" id="{D17E3843-D2DD-4F39-B8A1-504749B59D18}"/>
               </a:ext>
             </a:extLst>
           </p:cNvPr>
@@ -12870,7 +12878,7 @@
     </p:spTree>
     <p:extLst>
       <p:ext uri="{BB962C8B-B14F-4D97-AF65-F5344CB8AC3E}">
-        <p14:creationId xmlns:p14="http://schemas.microsoft.com/office/powerpoint/2010/main" val="1862856474"/>
+        <p14:creationId xmlns:p14="http://schemas.microsoft.com/office/powerpoint/2010/main" val="1120186310"/>
       </p:ext>
     </p:extLst>
   </p:cSld>
@@ -13071,7 +13079,7 @@
           <p:cNvPr id="22" name="">
             <a:extLst xmlns:a="http://schemas.openxmlformats.org/drawingml/2006/main">
               <a:ext uri="{FF2B5EF4-FFF2-40B4-BE49-F238E27FC236}">
-                <a16:creationId xmlns:a16="http://schemas.microsoft.com/office/drawing/2014/main" id="{5CE384B1-D394-4D6C-A055-220128F9E6B6}"/>
+                <a16:creationId xmlns:a16="http://schemas.microsoft.com/office/drawing/2014/main" id="{AF8C37D2-21A7-443D-BF8F-7AED20C94F58}"/>
               </a:ext>
             </a:extLst>
           </p:cNvPr>
@@ -13103,7 +13111,7 @@
           <p:cNvPr id="2" name="">
             <a:extLst xmlns:a="http://schemas.openxmlformats.org/drawingml/2006/main">
               <a:ext uri="{FF2B5EF4-FFF2-40B4-BE49-F238E27FC236}">
-                <a16:creationId xmlns:a16="http://schemas.microsoft.com/office/drawing/2014/main" id="{5531E4B8-476E-4016-9528-01F66E75B403}"/>
+                <a16:creationId xmlns:a16="http://schemas.microsoft.com/office/drawing/2014/main" id="{C2684753-C0CA-4570-B5A8-E897FD50035A}"/>
               </a:ext>
             </a:extLst>
           </p:cNvPr>
@@ -13160,7 +13168,7 @@
           <p:cNvPr id="3" name="">
             <a:extLst xmlns:a="http://schemas.openxmlformats.org/drawingml/2006/main">
               <a:ext uri="{FF2B5EF4-FFF2-40B4-BE49-F238E27FC236}">
-                <a16:creationId xmlns:a16="http://schemas.microsoft.com/office/drawing/2014/main" id="{8E98375F-B08C-4131-9B45-9DF37BBB3986}"/>
+                <a16:creationId xmlns:a16="http://schemas.microsoft.com/office/drawing/2014/main" id="{16835C91-0AEC-4FE5-B780-04F0B2B52374}"/>
               </a:ext>
             </a:extLst>
           </p:cNvPr>
@@ -13192,7 +13200,7 @@
           <p:cNvPr id="4" name="">
             <a:extLst xmlns:a="http://schemas.openxmlformats.org/drawingml/2006/main">
               <a:ext uri="{FF2B5EF4-FFF2-40B4-BE49-F238E27FC236}">
-                <a16:creationId xmlns:a16="http://schemas.microsoft.com/office/drawing/2014/main" id="{24E60946-FCF3-46B0-BF14-9C8A9EBF4888}"/>
+                <a16:creationId xmlns:a16="http://schemas.microsoft.com/office/drawing/2014/main" id="{5869D19E-4635-411D-8231-F87EF6650A2F}"/>
               </a:ext>
             </a:extLst>
           </p:cNvPr>
@@ -13249,7 +13257,7 @@
           <p:cNvPr id="5" name="">
             <a:extLst xmlns:a="http://schemas.openxmlformats.org/drawingml/2006/main">
               <a:ext uri="{FF2B5EF4-FFF2-40B4-BE49-F238E27FC236}">
-                <a16:creationId xmlns:a16="http://schemas.microsoft.com/office/drawing/2014/main" id="{7EA1DFEA-67BD-4181-88FA-745B745D6DF6}"/>
+                <a16:creationId xmlns:a16="http://schemas.microsoft.com/office/drawing/2014/main" id="{9ECDB4C8-4E8E-414D-AECE-130A403636A9}"/>
               </a:ext>
             </a:extLst>
           </p:cNvPr>
@@ -13306,7 +13314,7 @@
           <p:cNvPr id="6" name="">
             <a:extLst xmlns:a="http://schemas.openxmlformats.org/drawingml/2006/main">
               <a:ext uri="{FF2B5EF4-FFF2-40B4-BE49-F238E27FC236}">
-                <a16:creationId xmlns:a16="http://schemas.microsoft.com/office/drawing/2014/main" id="{2E955B12-320F-46AB-8ECA-8609C4DA51BD}"/>
+                <a16:creationId xmlns:a16="http://schemas.microsoft.com/office/drawing/2014/main" id="{DDF149D1-B635-4CA6-9B7A-8BDD6A5109FD}"/>
               </a:ext>
             </a:extLst>
           </p:cNvPr>
@@ -13363,7 +13371,7 @@
           <p:cNvPr id="7" name="">
             <a:extLst xmlns:a="http://schemas.openxmlformats.org/drawingml/2006/main">
               <a:ext uri="{FF2B5EF4-FFF2-40B4-BE49-F238E27FC236}">
-                <a16:creationId xmlns:a16="http://schemas.microsoft.com/office/drawing/2014/main" id="{B58AA859-C259-4006-B594-6C0EDFBE12BB}"/>
+                <a16:creationId xmlns:a16="http://schemas.microsoft.com/office/drawing/2014/main" id="{CEA432A2-7864-45B7-BC76-B0569261981F}"/>
               </a:ext>
             </a:extLst>
           </p:cNvPr>
@@ -13395,7 +13403,7 @@
           <p:cNvPr id="8" name="">
             <a:extLst xmlns:a="http://schemas.openxmlformats.org/drawingml/2006/main">
               <a:ext uri="{FF2B5EF4-FFF2-40B4-BE49-F238E27FC236}">
-                <a16:creationId xmlns:a16="http://schemas.microsoft.com/office/drawing/2014/main" id="{4333F7AB-00B3-4405-A7DF-4A59E3C0C0D6}"/>
+                <a16:creationId xmlns:a16="http://schemas.microsoft.com/office/drawing/2014/main" id="{5E971B98-EB81-4A15-87CE-966E71936511}"/>
               </a:ext>
             </a:extLst>
           </p:cNvPr>
@@ -13452,7 +13460,7 @@
           <p:cNvPr id="9" name="">
             <a:extLst xmlns:a="http://schemas.openxmlformats.org/drawingml/2006/main">
               <a:ext uri="{FF2B5EF4-FFF2-40B4-BE49-F238E27FC236}">
-                <a16:creationId xmlns:a16="http://schemas.microsoft.com/office/drawing/2014/main" id="{3F35E8B1-148A-4922-8FFF-D9859B14684C}"/>
+                <a16:creationId xmlns:a16="http://schemas.microsoft.com/office/drawing/2014/main" id="{3FA6D32C-EBC6-4503-B5F1-AA20CE1C616C}"/>
               </a:ext>
             </a:extLst>
           </p:cNvPr>
@@ -13509,7 +13517,7 @@
           <p:cNvPr id="10" name="">
             <a:extLst xmlns:a="http://schemas.openxmlformats.org/drawingml/2006/main">
               <a:ext uri="{FF2B5EF4-FFF2-40B4-BE49-F238E27FC236}">
-                <a16:creationId xmlns:a16="http://schemas.microsoft.com/office/drawing/2014/main" id="{DBDEDEFB-F23E-42B0-AA42-8A307E79F410}"/>
+                <a16:creationId xmlns:a16="http://schemas.microsoft.com/office/drawing/2014/main" id="{6AD1F633-1A6E-49CF-A8C1-B4D91B09AE45}"/>
               </a:ext>
             </a:extLst>
           </p:cNvPr>
@@ -13543,7 +13551,7 @@
           <p:cNvPr id="11" name="">
             <a:extLst xmlns:a="http://schemas.openxmlformats.org/drawingml/2006/main">
               <a:ext uri="{FF2B5EF4-FFF2-40B4-BE49-F238E27FC236}">
-                <a16:creationId xmlns:a16="http://schemas.microsoft.com/office/drawing/2014/main" id="{DB2C76F8-76FC-4309-870B-A62F717C0AE3}"/>
+                <a16:creationId xmlns:a16="http://schemas.microsoft.com/office/drawing/2014/main" id="{F6E26171-FC92-48A7-BB30-420768347774}"/>
               </a:ext>
             </a:extLst>
           </p:cNvPr>
@@ -13575,7 +13583,7 @@
           <p:cNvPr id="12" name="">
             <a:extLst xmlns:a="http://schemas.openxmlformats.org/drawingml/2006/main">
               <a:ext uri="{FF2B5EF4-FFF2-40B4-BE49-F238E27FC236}">
-                <a16:creationId xmlns:a16="http://schemas.microsoft.com/office/drawing/2014/main" id="{473FDC87-489C-4EAB-BA92-25FF1E5751E8}"/>
+                <a16:creationId xmlns:a16="http://schemas.microsoft.com/office/drawing/2014/main" id="{76DBD01D-0EBD-4B38-98A0-711293367C22}"/>
               </a:ext>
             </a:extLst>
           </p:cNvPr>
@@ -13632,7 +13640,7 @@
           <p:cNvPr id="13" name="">
             <a:extLst xmlns:a="http://schemas.openxmlformats.org/drawingml/2006/main">
               <a:ext uri="{FF2B5EF4-FFF2-40B4-BE49-F238E27FC236}">
-                <a16:creationId xmlns:a16="http://schemas.microsoft.com/office/drawing/2014/main" id="{5A8851AB-8FAC-48CF-A81D-035C10194C52}"/>
+                <a16:creationId xmlns:a16="http://schemas.microsoft.com/office/drawing/2014/main" id="{9C29F7C8-7ABE-4EAF-BF97-1B3D1E2D3905}"/>
               </a:ext>
             </a:extLst>
           </p:cNvPr>
@@ -13689,7 +13697,7 @@
           <p:cNvPr id="14" name="">
             <a:extLst xmlns:a="http://schemas.openxmlformats.org/drawingml/2006/main">
               <a:ext uri="{FF2B5EF4-FFF2-40B4-BE49-F238E27FC236}">
-                <a16:creationId xmlns:a16="http://schemas.microsoft.com/office/drawing/2014/main" id="{A5617F02-D061-42C0-8F36-0ADE4A9D2DB8}"/>
+                <a16:creationId xmlns:a16="http://schemas.microsoft.com/office/drawing/2014/main" id="{193CAF7A-BF74-4AAB-840C-C27001680798}"/>
               </a:ext>
             </a:extLst>
           </p:cNvPr>
@@ -13723,7 +13731,7 @@
           <p:cNvPr id="15" name="">
             <a:extLst xmlns:a="http://schemas.openxmlformats.org/drawingml/2006/main">
               <a:ext uri="{FF2B5EF4-FFF2-40B4-BE49-F238E27FC236}">
-                <a16:creationId xmlns:a16="http://schemas.microsoft.com/office/drawing/2014/main" id="{1C25AD14-C146-4873-A355-4E7A8B988079}"/>
+                <a16:creationId xmlns:a16="http://schemas.microsoft.com/office/drawing/2014/main" id="{55AF0026-9D49-4689-B87D-C32B9A8C773A}"/>
               </a:ext>
             </a:extLst>
           </p:cNvPr>
@@ -13755,7 +13763,7 @@
           <p:cNvPr id="16" name="">
             <a:extLst xmlns:a="http://schemas.openxmlformats.org/drawingml/2006/main">
               <a:ext uri="{FF2B5EF4-FFF2-40B4-BE49-F238E27FC236}">
-                <a16:creationId xmlns:a16="http://schemas.microsoft.com/office/drawing/2014/main" id="{AAD2149D-B27A-4CC3-8495-FE6271A06399}"/>
+                <a16:creationId xmlns:a16="http://schemas.microsoft.com/office/drawing/2014/main" id="{41CFB528-94C5-4430-BD3F-846E35EB446B}"/>
               </a:ext>
             </a:extLst>
           </p:cNvPr>
@@ -13812,7 +13820,7 @@
           <p:cNvPr id="17" name="">
             <a:extLst xmlns:a="http://schemas.openxmlformats.org/drawingml/2006/main">
               <a:ext uri="{FF2B5EF4-FFF2-40B4-BE49-F238E27FC236}">
-                <a16:creationId xmlns:a16="http://schemas.microsoft.com/office/drawing/2014/main" id="{AA87FCC4-8E1B-49A3-8588-625E4ADDAA13}"/>
+                <a16:creationId xmlns:a16="http://schemas.microsoft.com/office/drawing/2014/main" id="{804D47A8-AE91-419F-AED0-A363E2B817A5}"/>
               </a:ext>
             </a:extLst>
           </p:cNvPr>
@@ -13869,7 +13877,7 @@
           <p:cNvPr id="18" name="">
             <a:extLst xmlns:a="http://schemas.openxmlformats.org/drawingml/2006/main">
               <a:ext uri="{FF2B5EF4-FFF2-40B4-BE49-F238E27FC236}">
-                <a16:creationId xmlns:a16="http://schemas.microsoft.com/office/drawing/2014/main" id="{C26B97F0-F93C-4F73-89C9-20DFD85D2D1C}"/>
+                <a16:creationId xmlns:a16="http://schemas.microsoft.com/office/drawing/2014/main" id="{0C08AC64-24A2-4A40-9009-CF2E4C001270}"/>
               </a:ext>
             </a:extLst>
           </p:cNvPr>
@@ -13903,7 +13911,7 @@
           <p:cNvPr id="19" name="">
             <a:extLst xmlns:a="http://schemas.openxmlformats.org/drawingml/2006/main">
               <a:ext uri="{FF2B5EF4-FFF2-40B4-BE49-F238E27FC236}">
-                <a16:creationId xmlns:a16="http://schemas.microsoft.com/office/drawing/2014/main" id="{9B47436C-B3FE-4365-90E1-0E8A4EFCC0A1}"/>
+                <a16:creationId xmlns:a16="http://schemas.microsoft.com/office/drawing/2014/main" id="{B63548ED-1822-4FF5-965E-E98E01D8A94E}"/>
               </a:ext>
             </a:extLst>
           </p:cNvPr>
@@ -13935,7 +13943,7 @@
           <p:cNvPr id="20" name="">
             <a:extLst xmlns:a="http://schemas.openxmlformats.org/drawingml/2006/main">
               <a:ext uri="{FF2B5EF4-FFF2-40B4-BE49-F238E27FC236}">
-                <a16:creationId xmlns:a16="http://schemas.microsoft.com/office/drawing/2014/main" id="{1445620E-39CE-47DE-A134-CB37C29AE120}"/>
+                <a16:creationId xmlns:a16="http://schemas.microsoft.com/office/drawing/2014/main" id="{8D2CA86E-8EB8-4192-929E-76F515923B86}"/>
               </a:ext>
             </a:extLst>
           </p:cNvPr>
@@ -13992,7 +14000,7 @@
           <p:cNvPr id="21" name="">
             <a:extLst xmlns:a="http://schemas.openxmlformats.org/drawingml/2006/main">
               <a:ext uri="{FF2B5EF4-FFF2-40B4-BE49-F238E27FC236}">
-                <a16:creationId xmlns:a16="http://schemas.microsoft.com/office/drawing/2014/main" id="{8157D6F5-B8EF-431F-9A89-24F0F023842A}"/>
+                <a16:creationId xmlns:a16="http://schemas.microsoft.com/office/drawing/2014/main" id="{8757B1FB-12D5-4735-B35C-744BD8E54414}"/>
               </a:ext>
             </a:extLst>
           </p:cNvPr>
@@ -14047,7 +14055,7 @@
     </p:spTree>
     <p:extLst>
       <p:ext uri="{BB962C8B-B14F-4D97-AF65-F5344CB8AC3E}">
-        <p14:creationId xmlns:p14="http://schemas.microsoft.com/office/powerpoint/2010/main" val="621433099"/>
+        <p14:creationId xmlns:p14="http://schemas.microsoft.com/office/powerpoint/2010/main" val="1028180819"/>
       </p:ext>
     </p:extLst>
   </p:cSld>
